--- a/peid/TRABALHO_PRATICO/apresentacao_reservas.pptx
+++ b/peid/TRABALHO_PRATICO/apresentacao_reservas.pptx
@@ -3100,7 +3100,7 @@
     <p:bg>
       <p:bgPr>
         <a:solidFill>
-          <a:srgbClr val="003366"/>
+          <a:srgbClr val="F0EBE1"/>
         </a:solidFill>
         <a:effectLst/>
       </p:bgPr>
@@ -3144,7 +3144,7 @@
             <a:pPr algn="ctr">
               <a:defRPr sz="5400" b="1">
                 <a:solidFill>
-                  <a:srgbClr val="FFFFFF"/>
+                  <a:srgbClr val="65523F"/>
                 </a:solidFill>
               </a:defRPr>
             </a:pPr>
@@ -3162,8 +3162,8 @@
         </p:nvSpPr>
         <p:spPr>
           <a:xfrm>
-            <a:off x="457200" y="3840480"/>
-            <a:ext cx="8229600" cy="914400"/>
+            <a:off x="2907664" y="3840480"/>
+            <a:ext cx="3328668" cy="461665"/>
           </a:xfrm>
           <a:prstGeom prst="rect">
             <a:avLst/>
@@ -3179,13 +3179,19 @@
             <a:pPr algn="ctr">
               <a:defRPr sz="2400">
                 <a:solidFill>
-                  <a:srgbClr val="2980B9"/>
+                  <a:srgbClr val="CC5500"/>
                 </a:solidFill>
               </a:defRPr>
             </a:pPr>
             <a:r>
-              <a:t>DE RESERVAS HOTELEIRO</a:t>
-            </a:r>
+              <a:rPr dirty="0"/>
+              <a:t>DE RESERVAS HOTEL</a:t>
+            </a:r>
+            <a:r>
+              <a:rPr lang="pt-PT" dirty="0"/>
+              <a:t>ARIA</a:t>
+            </a:r>
+            <a:endParaRPr dirty="0"/>
           </a:p>
         </p:txBody>
       </p:sp>
@@ -3203,7 +3209,7 @@
     <p:bg>
       <p:bgPr>
         <a:solidFill>
-          <a:srgbClr val="FFFFFF"/>
+          <a:srgbClr val="F0EBE1"/>
         </a:solidFill>
         <a:effectLst/>
       </p:bgPr>
@@ -3237,11 +3243,11 @@
             <a:avLst/>
           </a:prstGeom>
           <a:solidFill>
-            <a:srgbClr val="003366"/>
+            <a:srgbClr val="65523F"/>
           </a:solidFill>
           <a:ln>
             <a:solidFill>
-              <a:srgbClr val="003366"/>
+              <a:srgbClr val="65523F"/>
             </a:solidFill>
           </a:ln>
         </p:spPr>
@@ -3297,7 +3303,7 @@
             <a:avLst/>
           </a:prstGeom>
           <a:solidFill>
-            <a:srgbClr val="2980B9"/>
+            <a:srgbClr val="CC5500"/>
           </a:solidFill>
           <a:ln>
             <a:noFill/>
@@ -3351,7 +3357,7 @@
             <a:pPr>
               <a:defRPr sz="1100" b="0">
                 <a:solidFill>
-                  <a:srgbClr val="95A5A6"/>
+                  <a:srgbClr val="786E64"/>
                 </a:solidFill>
               </a:defRPr>
             </a:pPr>
@@ -3376,11 +3382,11 @@
             <a:avLst/>
           </a:prstGeom>
           <a:solidFill>
-            <a:srgbClr val="ECF0F1"/>
+            <a:srgbClr val="C2A78C"/>
           </a:solidFill>
           <a:ln>
             <a:solidFill>
-              <a:srgbClr val="95A5A6"/>
+              <a:srgbClr val="65523F"/>
             </a:solidFill>
           </a:ln>
         </p:spPr>
@@ -3408,7 +3414,7 @@
               </a:spcBef>
               <a:defRPr sz="1000">
                 <a:solidFill>
-                  <a:srgbClr val="34495E"/>
+                  <a:srgbClr val="463C32"/>
                 </a:solidFill>
                 <a:latin typeface="Courier New"/>
               </a:defRPr>
@@ -3472,7 +3478,7 @@
             <a:pPr>
               <a:defRPr sz="1000" b="1">
                 <a:solidFill>
-                  <a:srgbClr val="003366"/>
+                  <a:srgbClr val="65523F"/>
                 </a:solidFill>
               </a:defRPr>
             </a:pPr>
@@ -3500,7 +3506,7 @@
     <p:bg>
       <p:bgPr>
         <a:solidFill>
-          <a:srgbClr val="FFFFFF"/>
+          <a:srgbClr val="F0EBE1"/>
         </a:solidFill>
         <a:effectLst/>
       </p:bgPr>
@@ -3534,11 +3540,11 @@
             <a:avLst/>
           </a:prstGeom>
           <a:solidFill>
-            <a:srgbClr val="003366"/>
+            <a:srgbClr val="65523F"/>
           </a:solidFill>
           <a:ln>
             <a:solidFill>
-              <a:srgbClr val="003366"/>
+              <a:srgbClr val="65523F"/>
             </a:solidFill>
           </a:ln>
         </p:spPr>
@@ -3594,7 +3600,7 @@
             <a:avLst/>
           </a:prstGeom>
           <a:solidFill>
-            <a:srgbClr val="2980B9"/>
+            <a:srgbClr val="CC5500"/>
           </a:solidFill>
           <a:ln>
             <a:noFill/>
@@ -3648,7 +3654,7 @@
             <a:pPr>
               <a:defRPr sz="1100" b="0">
                 <a:solidFill>
-                  <a:srgbClr val="95A5A6"/>
+                  <a:srgbClr val="786E64"/>
                 </a:solidFill>
               </a:defRPr>
             </a:pPr>
@@ -3674,8 +3680,8 @@
         </p:blipFill>
         <p:spPr>
           <a:xfrm>
-            <a:off x="457200" y="1371600"/>
-            <a:ext cx="8229600" cy="6639474"/>
+            <a:off x="630936" y="1215222"/>
+            <a:ext cx="5860805" cy="4728378"/>
           </a:xfrm>
           <a:prstGeom prst="rect">
             <a:avLst/>
@@ -3690,7 +3696,7 @@
         </p:nvSpPr>
         <p:spPr>
           <a:xfrm>
-            <a:off x="731520" y="4846320"/>
+            <a:off x="630936" y="5961888"/>
             <a:ext cx="7680960" cy="1371600"/>
           </a:xfrm>
           <a:prstGeom prst="rect">
@@ -3707,20 +3713,87 @@
             <a:pPr>
               <a:defRPr sz="1100" b="1">
                 <a:solidFill>
-                  <a:srgbClr val="003366"/>
+                  <a:srgbClr val="65523F"/>
                 </a:solidFill>
               </a:defRPr>
             </a:pPr>
             <a:r>
-              <a:t>✓ Resposta XML estruturada</a:t>
-            </a:r>
-            <a:br/>
-            <a:r>
-              <a:t>✓ Todos os campos retornam (hospede, datas, serviços, valor_total)</a:t>
-            </a:r>
-            <a:br/>
-            <a:r>
-              <a:t>✓ Performance excelente: 35ms</a:t>
+              <a:rPr dirty="0"/>
+              <a:t>✓ Resposta XML </a:t>
+            </a:r>
+            <a:r>
+              <a:rPr dirty="0" err="1"/>
+              <a:t>estruturada</a:t>
+            </a:r>
+            <a:br>
+              <a:rPr dirty="0"/>
+            </a:br>
+            <a:r>
+              <a:rPr dirty="0"/>
+              <a:t>✓ Todos </a:t>
+            </a:r>
+            <a:r>
+              <a:rPr dirty="0" err="1"/>
+              <a:t>os</a:t>
+            </a:r>
+            <a:r>
+              <a:rPr dirty="0"/>
+              <a:t> campos </a:t>
+            </a:r>
+            <a:r>
+              <a:rPr dirty="0" err="1"/>
+              <a:t>retornam</a:t>
+            </a:r>
+            <a:r>
+              <a:rPr dirty="0"/>
+              <a:t> (</a:t>
+            </a:r>
+            <a:r>
+              <a:rPr dirty="0" err="1"/>
+              <a:t>hospede</a:t>
+            </a:r>
+            <a:r>
+              <a:rPr dirty="0"/>
+              <a:t>, </a:t>
+            </a:r>
+            <a:r>
+              <a:rPr dirty="0" err="1"/>
+              <a:t>datas</a:t>
+            </a:r>
+            <a:r>
+              <a:rPr dirty="0"/>
+              <a:t>, </a:t>
+            </a:r>
+            <a:r>
+              <a:rPr dirty="0" err="1"/>
+              <a:t>serviços</a:t>
+            </a:r>
+            <a:r>
+              <a:rPr dirty="0"/>
+              <a:t>, </a:t>
+            </a:r>
+            <a:r>
+              <a:rPr dirty="0" err="1"/>
+              <a:t>valor_total</a:t>
+            </a:r>
+            <a:r>
+              <a:rPr dirty="0"/>
+              <a:t>)</a:t>
+            </a:r>
+            <a:br>
+              <a:rPr dirty="0"/>
+            </a:br>
+            <a:r>
+              <a:rPr dirty="0"/>
+              <a:t>✓ Performance </a:t>
+            </a:r>
+            <a:r>
+              <a:rPr dirty="0" err="1"/>
+              <a:t>excelente</a:t>
+            </a:r>
+            <a:r>
+              <a:rPr dirty="0"/>
+              <a:t>: 35ms</a:t>
             </a:r>
           </a:p>
         </p:txBody>
@@ -3739,7 +3812,7 @@
     <p:bg>
       <p:bgPr>
         <a:solidFill>
-          <a:srgbClr val="FFFFFF"/>
+          <a:srgbClr val="F0EBE1"/>
         </a:solidFill>
         <a:effectLst/>
       </p:bgPr>
@@ -3773,11 +3846,11 @@
             <a:avLst/>
           </a:prstGeom>
           <a:solidFill>
-            <a:srgbClr val="003366"/>
+            <a:srgbClr val="65523F"/>
           </a:solidFill>
           <a:ln>
             <a:solidFill>
-              <a:srgbClr val="003366"/>
+              <a:srgbClr val="65523F"/>
             </a:solidFill>
           </a:ln>
         </p:spPr>
@@ -3833,7 +3906,7 @@
             <a:avLst/>
           </a:prstGeom>
           <a:solidFill>
-            <a:srgbClr val="2980B9"/>
+            <a:srgbClr val="CC5500"/>
           </a:solidFill>
           <a:ln>
             <a:noFill/>
@@ -3887,7 +3960,7 @@
             <a:pPr>
               <a:defRPr sz="1100" b="0">
                 <a:solidFill>
-                  <a:srgbClr val="95A5A6"/>
+                  <a:srgbClr val="786E64"/>
                 </a:solidFill>
               </a:defRPr>
             </a:pPr>
@@ -3912,11 +3985,11 @@
             <a:avLst/>
           </a:prstGeom>
           <a:solidFill>
-            <a:srgbClr val="ECF0F1"/>
+            <a:srgbClr val="C2A78C"/>
           </a:solidFill>
           <a:ln>
             <a:solidFill>
-              <a:srgbClr val="95A5A6"/>
+              <a:srgbClr val="65523F"/>
             </a:solidFill>
           </a:ln>
         </p:spPr>
@@ -3944,7 +4017,7 @@
               </a:spcBef>
               <a:defRPr sz="1000">
                 <a:solidFill>
-                  <a:srgbClr val="34495E"/>
+                  <a:srgbClr val="463C32"/>
                 </a:solidFill>
                 <a:latin typeface="Courier New"/>
               </a:defRPr>
@@ -4009,7 +4082,7 @@
     <p:bg>
       <p:bgPr>
         <a:solidFill>
-          <a:srgbClr val="FFFFFF"/>
+          <a:srgbClr val="F0EBE1"/>
         </a:solidFill>
         <a:effectLst/>
       </p:bgPr>
@@ -4043,11 +4116,11 @@
             <a:avLst/>
           </a:prstGeom>
           <a:solidFill>
-            <a:srgbClr val="003366"/>
+            <a:srgbClr val="65523F"/>
           </a:solidFill>
           <a:ln>
             <a:solidFill>
-              <a:srgbClr val="003366"/>
+              <a:srgbClr val="65523F"/>
             </a:solidFill>
           </a:ln>
         </p:spPr>
@@ -4103,7 +4176,7 @@
             <a:avLst/>
           </a:prstGeom>
           <a:solidFill>
-            <a:srgbClr val="2980B9"/>
+            <a:srgbClr val="CC5500"/>
           </a:solidFill>
           <a:ln>
             <a:noFill/>
@@ -4157,7 +4230,7 @@
             <a:pPr>
               <a:defRPr sz="1100" b="0">
                 <a:solidFill>
-                  <a:srgbClr val="95A5A6"/>
+                  <a:srgbClr val="786E64"/>
                 </a:solidFill>
               </a:defRPr>
             </a:pPr>
@@ -4183,8 +4256,8 @@
         </p:blipFill>
         <p:spPr>
           <a:xfrm>
-            <a:off x="457200" y="1371600"/>
-            <a:ext cx="8229600" cy="6193194"/>
+            <a:off x="731520" y="1234440"/>
+            <a:ext cx="6261191" cy="4711866"/>
           </a:xfrm>
           <a:prstGeom prst="rect">
             <a:avLst/>
@@ -4199,7 +4272,7 @@
         </p:nvSpPr>
         <p:spPr>
           <a:xfrm>
-            <a:off x="731520" y="4846320"/>
+            <a:off x="649224" y="5973738"/>
             <a:ext cx="7680960" cy="1371600"/>
           </a:xfrm>
           <a:prstGeom prst="rect">
@@ -4216,7 +4289,7 @@
             <a:pPr>
               <a:defRPr sz="1100" b="1">
                 <a:solidFill>
-                  <a:srgbClr val="003366"/>
+                  <a:srgbClr val="65523F"/>
                 </a:solidFill>
               </a:defRPr>
             </a:pPr>
@@ -4248,7 +4321,7 @@
     <p:bg>
       <p:bgPr>
         <a:solidFill>
-          <a:srgbClr val="FFFFFF"/>
+          <a:srgbClr val="F0EBE1"/>
         </a:solidFill>
         <a:effectLst/>
       </p:bgPr>
@@ -4282,11 +4355,11 @@
             <a:avLst/>
           </a:prstGeom>
           <a:solidFill>
-            <a:srgbClr val="003366"/>
+            <a:srgbClr val="65523F"/>
           </a:solidFill>
           <a:ln>
             <a:solidFill>
-              <a:srgbClr val="003366"/>
+              <a:srgbClr val="65523F"/>
             </a:solidFill>
           </a:ln>
         </p:spPr>
@@ -4342,7 +4415,7 @@
             <a:avLst/>
           </a:prstGeom>
           <a:solidFill>
-            <a:srgbClr val="2980B9"/>
+            <a:srgbClr val="CC5500"/>
           </a:solidFill>
           <a:ln>
             <a:noFill/>
@@ -4396,7 +4469,7 @@
             <a:pPr>
               <a:defRPr sz="1100" b="0">
                 <a:solidFill>
-                  <a:srgbClr val="95A5A6"/>
+                  <a:srgbClr val="786E64"/>
                 </a:solidFill>
               </a:defRPr>
             </a:pPr>
@@ -4421,11 +4494,11 @@
             <a:avLst/>
           </a:prstGeom>
           <a:solidFill>
-            <a:srgbClr val="ECF0F1"/>
+            <a:srgbClr val="C2A78C"/>
           </a:solidFill>
           <a:ln>
             <a:solidFill>
-              <a:srgbClr val="95A5A6"/>
+              <a:srgbClr val="65523F"/>
             </a:solidFill>
           </a:ln>
         </p:spPr>
@@ -4453,7 +4526,7 @@
               </a:spcBef>
               <a:defRPr sz="1000">
                 <a:solidFill>
-                  <a:srgbClr val="34495E"/>
+                  <a:srgbClr val="463C32"/>
                 </a:solidFill>
                 <a:latin typeface="Courier New"/>
               </a:defRPr>
@@ -4521,7 +4594,7 @@
             <a:pPr>
               <a:defRPr sz="1100" b="1">
                 <a:solidFill>
-                  <a:srgbClr val="2980B9"/>
+                  <a:srgbClr val="CC5500"/>
                 </a:solidFill>
               </a:defRPr>
             </a:pPr>
@@ -4545,7 +4618,7 @@
     <p:bg>
       <p:bgPr>
         <a:solidFill>
-          <a:srgbClr val="FFFFFF"/>
+          <a:srgbClr val="F0EBE1"/>
         </a:solidFill>
         <a:effectLst/>
       </p:bgPr>
@@ -4579,11 +4652,11 @@
             <a:avLst/>
           </a:prstGeom>
           <a:solidFill>
-            <a:srgbClr val="003366"/>
+            <a:srgbClr val="65523F"/>
           </a:solidFill>
           <a:ln>
             <a:solidFill>
-              <a:srgbClr val="003366"/>
+              <a:srgbClr val="65523F"/>
             </a:solidFill>
           </a:ln>
         </p:spPr>
@@ -4639,7 +4712,7 @@
             <a:avLst/>
           </a:prstGeom>
           <a:solidFill>
-            <a:srgbClr val="2980B9"/>
+            <a:srgbClr val="CC5500"/>
           </a:solidFill>
           <a:ln>
             <a:noFill/>
@@ -4693,7 +4766,7 @@
             <a:pPr>
               <a:defRPr sz="1100" b="0">
                 <a:solidFill>
-                  <a:srgbClr val="95A5A6"/>
+                  <a:srgbClr val="786E64"/>
                 </a:solidFill>
               </a:defRPr>
             </a:pPr>
@@ -4719,8 +4792,8 @@
         </p:blipFill>
         <p:spPr>
           <a:xfrm>
-            <a:off x="457200" y="1371600"/>
-            <a:ext cx="8229600" cy="6197768"/>
+            <a:off x="347472" y="1234440"/>
+            <a:ext cx="7379208" cy="4471416"/>
           </a:xfrm>
           <a:prstGeom prst="rect">
             <a:avLst/>
@@ -4735,7 +4808,7 @@
         </p:nvSpPr>
         <p:spPr>
           <a:xfrm>
-            <a:off x="731520" y="4846320"/>
+            <a:off x="347472" y="5742432"/>
             <a:ext cx="7680960" cy="1371600"/>
           </a:xfrm>
           <a:prstGeom prst="rect">
@@ -4752,21 +4825,93 @@
             <a:pPr>
               <a:defRPr sz="1100" b="1">
                 <a:solidFill>
-                  <a:srgbClr val="003366"/>
+                  <a:srgbClr val="65523F"/>
                 </a:solidFill>
               </a:defRPr>
             </a:pPr>
             <a:r>
-              <a:t>✓ Somatório correto (Jantar 6 + Spa 4 + Bar 4 + Transporte 3 = 17)</a:t>
-            </a:r>
-            <a:br/>
-            <a:r>
-              <a:t>✓ Lógica de agregação funcional</a:t>
-            </a:r>
-            <a:br/>
-            <a:r>
-              <a:t>✓ Todos os serviços contabilizados corretamente</a:t>
-            </a:r>
+              <a:rPr dirty="0"/>
+              <a:t>✓ </a:t>
+            </a:r>
+            <a:r>
+              <a:rPr dirty="0" err="1"/>
+              <a:t>Somatório</a:t>
+            </a:r>
+            <a:r>
+              <a:rPr dirty="0"/>
+              <a:t> </a:t>
+            </a:r>
+            <a:r>
+              <a:rPr dirty="0" err="1"/>
+              <a:t>correto</a:t>
+            </a:r>
+            <a:r>
+              <a:rPr dirty="0"/>
+              <a:t> (Jantar 6 + Spa 4 + Bar 4 + Transporte 3 = 17)</a:t>
+            </a:r>
+            <a:br>
+              <a:rPr dirty="0"/>
+            </a:br>
+            <a:r>
+              <a:rPr dirty="0"/>
+              <a:t>✓ </a:t>
+            </a:r>
+            <a:r>
+              <a:rPr dirty="0" err="1"/>
+              <a:t>Lógica</a:t>
+            </a:r>
+            <a:r>
+              <a:rPr dirty="0"/>
+              <a:t> de </a:t>
+            </a:r>
+            <a:r>
+              <a:rPr dirty="0" err="1"/>
+              <a:t>agregação</a:t>
+            </a:r>
+            <a:r>
+              <a:rPr dirty="0"/>
+              <a:t> </a:t>
+            </a:r>
+            <a:r>
+              <a:rPr dirty="0" err="1"/>
+              <a:t>funcional</a:t>
+            </a:r>
+            <a:br>
+              <a:rPr dirty="0"/>
+            </a:br>
+            <a:r>
+              <a:rPr dirty="0"/>
+              <a:t>✓ Todos </a:t>
+            </a:r>
+            <a:r>
+              <a:rPr dirty="0" err="1"/>
+              <a:t>os</a:t>
+            </a:r>
+            <a:r>
+              <a:rPr dirty="0"/>
+              <a:t> </a:t>
+            </a:r>
+            <a:r>
+              <a:rPr dirty="0" err="1"/>
+              <a:t>serviços</a:t>
+            </a:r>
+            <a:r>
+              <a:rPr dirty="0"/>
+              <a:t> </a:t>
+            </a:r>
+            <a:r>
+              <a:rPr dirty="0" err="1"/>
+              <a:t>contabilizados</a:t>
+            </a:r>
+            <a:r>
+              <a:rPr dirty="0"/>
+              <a:t> </a:t>
+            </a:r>
+            <a:r>
+              <a:rPr dirty="0" err="1"/>
+              <a:t>corretamente</a:t>
+            </a:r>
+            <a:endParaRPr dirty="0"/>
           </a:p>
         </p:txBody>
       </p:sp>
@@ -4784,7 +4929,7 @@
     <p:bg>
       <p:bgPr>
         <a:solidFill>
-          <a:srgbClr val="FFFFFF"/>
+          <a:srgbClr val="F0EBE1"/>
         </a:solidFill>
         <a:effectLst/>
       </p:bgPr>
@@ -4818,11 +4963,11 @@
             <a:avLst/>
           </a:prstGeom>
           <a:solidFill>
-            <a:srgbClr val="003366"/>
+            <a:srgbClr val="65523F"/>
           </a:solidFill>
           <a:ln>
             <a:solidFill>
-              <a:srgbClr val="003366"/>
+              <a:srgbClr val="65523F"/>
             </a:solidFill>
           </a:ln>
         </p:spPr>
@@ -4878,7 +5023,7 @@
             <a:avLst/>
           </a:prstGeom>
           <a:solidFill>
-            <a:srgbClr val="2980B9"/>
+            <a:srgbClr val="CC5500"/>
           </a:solidFill>
           <a:ln>
             <a:noFill/>
@@ -4932,7 +5077,7 @@
             <a:pPr>
               <a:defRPr sz="1100" b="0">
                 <a:solidFill>
-                  <a:srgbClr val="95A5A6"/>
+                  <a:srgbClr val="786E64"/>
                 </a:solidFill>
               </a:defRPr>
             </a:pPr>
@@ -5027,7 +5172,7 @@
                   </a:txBody>
                   <a:tcPr>
                     <a:solidFill>
-                      <a:srgbClr val="003366"/>
+                      <a:srgbClr val="65523F"/>
                     </a:solidFill>
                   </a:tcPr>
                 </a:tc>
@@ -5050,7 +5195,7 @@
                   </a:txBody>
                   <a:tcPr>
                     <a:solidFill>
-                      <a:srgbClr val="003366"/>
+                      <a:srgbClr val="65523F"/>
                     </a:solidFill>
                   </a:tcPr>
                 </a:tc>
@@ -5073,7 +5218,7 @@
                   </a:txBody>
                   <a:tcPr>
                     <a:solidFill>
-                      <a:srgbClr val="003366"/>
+                      <a:srgbClr val="65523F"/>
                     </a:solidFill>
                   </a:tcPr>
                 </a:tc>
@@ -5092,7 +5237,7 @@
                       <a:pPr algn="ctr">
                         <a:defRPr sz="1200">
                           <a:solidFill>
-                            <a:srgbClr val="34495E"/>
+                            <a:srgbClr val="463C32"/>
                           </a:solidFill>
                         </a:defRPr>
                       </a:pPr>
@@ -5111,7 +5256,7 @@
                       <a:pPr algn="ctr">
                         <a:defRPr sz="1200">
                           <a:solidFill>
-                            <a:srgbClr val="34495E"/>
+                            <a:srgbClr val="463C32"/>
                           </a:solidFill>
                         </a:defRPr>
                       </a:pPr>
@@ -5130,7 +5275,7 @@
                       <a:pPr algn="ctr">
                         <a:defRPr sz="1200">
                           <a:solidFill>
-                            <a:srgbClr val="34495E"/>
+                            <a:srgbClr val="463C32"/>
                           </a:solidFill>
                         </a:defRPr>
                       </a:pPr>
@@ -5156,7 +5301,7 @@
                       <a:pPr algn="ctr">
                         <a:defRPr sz="1200">
                           <a:solidFill>
-                            <a:srgbClr val="34495E"/>
+                            <a:srgbClr val="463C32"/>
                           </a:solidFill>
                         </a:defRPr>
                       </a:pPr>
@@ -5167,7 +5312,7 @@
                   </a:txBody>
                   <a:tcPr>
                     <a:solidFill>
-                      <a:srgbClr val="ECF0F1"/>
+                      <a:srgbClr val="C2A78C"/>
                     </a:solidFill>
                   </a:tcPr>
                 </a:tc>
@@ -5179,7 +5324,7 @@
                       <a:pPr algn="ctr">
                         <a:defRPr sz="1200">
                           <a:solidFill>
-                            <a:srgbClr val="34495E"/>
+                            <a:srgbClr val="463C32"/>
                           </a:solidFill>
                         </a:defRPr>
                       </a:pPr>
@@ -5190,7 +5335,7 @@
                   </a:txBody>
                   <a:tcPr>
                     <a:solidFill>
-                      <a:srgbClr val="ECF0F1"/>
+                      <a:srgbClr val="C2A78C"/>
                     </a:solidFill>
                   </a:tcPr>
                 </a:tc>
@@ -5202,7 +5347,7 @@
                       <a:pPr algn="ctr">
                         <a:defRPr sz="1200">
                           <a:solidFill>
-                            <a:srgbClr val="34495E"/>
+                            <a:srgbClr val="463C32"/>
                           </a:solidFill>
                         </a:defRPr>
                       </a:pPr>
@@ -5213,7 +5358,7 @@
                   </a:txBody>
                   <a:tcPr>
                     <a:solidFill>
-                      <a:srgbClr val="ECF0F1"/>
+                      <a:srgbClr val="C2A78C"/>
                     </a:solidFill>
                   </a:tcPr>
                 </a:tc>
@@ -5232,7 +5377,7 @@
                       <a:pPr algn="ctr">
                         <a:defRPr sz="1200">
                           <a:solidFill>
-                            <a:srgbClr val="34495E"/>
+                            <a:srgbClr val="463C32"/>
                           </a:solidFill>
                         </a:defRPr>
                       </a:pPr>
@@ -5251,7 +5396,7 @@
                       <a:pPr algn="ctr">
                         <a:defRPr sz="1200">
                           <a:solidFill>
-                            <a:srgbClr val="34495E"/>
+                            <a:srgbClr val="463C32"/>
                           </a:solidFill>
                         </a:defRPr>
                       </a:pPr>
@@ -5270,7 +5415,7 @@
                       <a:pPr algn="ctr">
                         <a:defRPr sz="1200">
                           <a:solidFill>
-                            <a:srgbClr val="34495E"/>
+                            <a:srgbClr val="463C32"/>
                           </a:solidFill>
                         </a:defRPr>
                       </a:pPr>
@@ -5296,7 +5441,7 @@
                       <a:pPr algn="ctr">
                         <a:defRPr sz="1200">
                           <a:solidFill>
-                            <a:srgbClr val="34495E"/>
+                            <a:srgbClr val="463C32"/>
                           </a:solidFill>
                         </a:defRPr>
                       </a:pPr>
@@ -5307,7 +5452,7 @@
                   </a:txBody>
                   <a:tcPr>
                     <a:solidFill>
-                      <a:srgbClr val="ECF0F1"/>
+                      <a:srgbClr val="C2A78C"/>
                     </a:solidFill>
                   </a:tcPr>
                 </a:tc>
@@ -5319,7 +5464,7 @@
                       <a:pPr algn="ctr">
                         <a:defRPr sz="1200">
                           <a:solidFill>
-                            <a:srgbClr val="34495E"/>
+                            <a:srgbClr val="463C32"/>
                           </a:solidFill>
                         </a:defRPr>
                       </a:pPr>
@@ -5330,7 +5475,7 @@
                   </a:txBody>
                   <a:tcPr>
                     <a:solidFill>
-                      <a:srgbClr val="ECF0F1"/>
+                      <a:srgbClr val="C2A78C"/>
                     </a:solidFill>
                   </a:tcPr>
                 </a:tc>
@@ -5342,7 +5487,7 @@
                       <a:pPr algn="ctr">
                         <a:defRPr sz="1200">
                           <a:solidFill>
-                            <a:srgbClr val="34495E"/>
+                            <a:srgbClr val="463C32"/>
                           </a:solidFill>
                         </a:defRPr>
                       </a:pPr>
@@ -5353,7 +5498,7 @@
                   </a:txBody>
                   <a:tcPr>
                     <a:solidFill>
-                      <a:srgbClr val="ECF0F1"/>
+                      <a:srgbClr val="C2A78C"/>
                     </a:solidFill>
                   </a:tcPr>
                 </a:tc>
@@ -5372,7 +5517,7 @@
                       <a:pPr algn="ctr">
                         <a:defRPr sz="1200">
                           <a:solidFill>
-                            <a:srgbClr val="34495E"/>
+                            <a:srgbClr val="463C32"/>
                           </a:solidFill>
                         </a:defRPr>
                       </a:pPr>
@@ -5391,7 +5536,7 @@
                       <a:pPr algn="ctr">
                         <a:defRPr sz="1200">
                           <a:solidFill>
-                            <a:srgbClr val="34495E"/>
+                            <a:srgbClr val="463C32"/>
                           </a:solidFill>
                         </a:defRPr>
                       </a:pPr>
@@ -5410,7 +5555,7 @@
                       <a:pPr algn="ctr">
                         <a:defRPr sz="1200">
                           <a:solidFill>
-                            <a:srgbClr val="34495E"/>
+                            <a:srgbClr val="463C32"/>
                           </a:solidFill>
                         </a:defRPr>
                       </a:pPr>
@@ -5445,7 +5590,7 @@
     <p:bg>
       <p:bgPr>
         <a:solidFill>
-          <a:srgbClr val="FFFFFF"/>
+          <a:srgbClr val="F0EBE1"/>
         </a:solidFill>
         <a:effectLst/>
       </p:bgPr>
@@ -5479,11 +5624,11 @@
             <a:avLst/>
           </a:prstGeom>
           <a:solidFill>
-            <a:srgbClr val="003366"/>
+            <a:srgbClr val="65523F"/>
           </a:solidFill>
           <a:ln>
             <a:solidFill>
-              <a:srgbClr val="003366"/>
+              <a:srgbClr val="65523F"/>
             </a:solidFill>
           </a:ln>
         </p:spPr>
@@ -5539,7 +5684,7 @@
             <a:avLst/>
           </a:prstGeom>
           <a:solidFill>
-            <a:srgbClr val="2980B9"/>
+            <a:srgbClr val="CC5500"/>
           </a:solidFill>
           <a:ln>
             <a:noFill/>
@@ -5593,7 +5738,7 @@
             <a:pPr>
               <a:defRPr sz="1100" b="0">
                 <a:solidFill>
-                  <a:srgbClr val="95A5A6"/>
+                  <a:srgbClr val="786E64"/>
                 </a:solidFill>
               </a:defRPr>
             </a:pPr>
@@ -5695,7 +5840,7 @@
                   </a:txBody>
                   <a:tcPr>
                     <a:solidFill>
-                      <a:srgbClr val="003366"/>
+                      <a:srgbClr val="65523F"/>
                     </a:solidFill>
                   </a:tcPr>
                 </a:tc>
@@ -5718,7 +5863,7 @@
                   </a:txBody>
                   <a:tcPr>
                     <a:solidFill>
-                      <a:srgbClr val="003366"/>
+                      <a:srgbClr val="65523F"/>
                     </a:solidFill>
                   </a:tcPr>
                 </a:tc>
@@ -5741,7 +5886,7 @@
                   </a:txBody>
                   <a:tcPr>
                     <a:solidFill>
-                      <a:srgbClr val="003366"/>
+                      <a:srgbClr val="65523F"/>
                     </a:solidFill>
                   </a:tcPr>
                 </a:tc>
@@ -5764,7 +5909,7 @@
                   </a:txBody>
                   <a:tcPr>
                     <a:solidFill>
-                      <a:srgbClr val="003366"/>
+                      <a:srgbClr val="65523F"/>
                     </a:solidFill>
                   </a:tcPr>
                 </a:tc>
@@ -5783,7 +5928,7 @@
                       <a:pPr algn="ctr">
                         <a:defRPr sz="1200">
                           <a:solidFill>
-                            <a:srgbClr val="34495E"/>
+                            <a:srgbClr val="463C32"/>
                           </a:solidFill>
                         </a:defRPr>
                       </a:pPr>
@@ -5802,7 +5947,7 @@
                       <a:pPr algn="ctr">
                         <a:defRPr sz="1200">
                           <a:solidFill>
-                            <a:srgbClr val="34495E"/>
+                            <a:srgbClr val="463C32"/>
                           </a:solidFill>
                         </a:defRPr>
                       </a:pPr>
@@ -5821,7 +5966,7 @@
                       <a:pPr algn="ctr">
                         <a:defRPr sz="1200">
                           <a:solidFill>
-                            <a:srgbClr val="34495E"/>
+                            <a:srgbClr val="463C32"/>
                           </a:solidFill>
                         </a:defRPr>
                       </a:pPr>
@@ -5840,7 +5985,7 @@
                       <a:pPr algn="ctr">
                         <a:defRPr sz="1200">
                           <a:solidFill>
-                            <a:srgbClr val="34495E"/>
+                            <a:srgbClr val="463C32"/>
                           </a:solidFill>
                         </a:defRPr>
                       </a:pPr>
@@ -5866,7 +6011,7 @@
                       <a:pPr algn="ctr">
                         <a:defRPr sz="1200">
                           <a:solidFill>
-                            <a:srgbClr val="34495E"/>
+                            <a:srgbClr val="463C32"/>
                           </a:solidFill>
                         </a:defRPr>
                       </a:pPr>
@@ -5877,7 +6022,7 @@
                   </a:txBody>
                   <a:tcPr>
                     <a:solidFill>
-                      <a:srgbClr val="ECF0F1"/>
+                      <a:srgbClr val="C2A78C"/>
                     </a:solidFill>
                   </a:tcPr>
                 </a:tc>
@@ -5889,7 +6034,7 @@
                       <a:pPr algn="ctr">
                         <a:defRPr sz="1200">
                           <a:solidFill>
-                            <a:srgbClr val="34495E"/>
+                            <a:srgbClr val="463C32"/>
                           </a:solidFill>
                         </a:defRPr>
                       </a:pPr>
@@ -5900,7 +6045,7 @@
                   </a:txBody>
                   <a:tcPr>
                     <a:solidFill>
-                      <a:srgbClr val="ECF0F1"/>
+                      <a:srgbClr val="C2A78C"/>
                     </a:solidFill>
                   </a:tcPr>
                 </a:tc>
@@ -5912,7 +6057,7 @@
                       <a:pPr algn="ctr">
                         <a:defRPr sz="1200">
                           <a:solidFill>
-                            <a:srgbClr val="34495E"/>
+                            <a:srgbClr val="463C32"/>
                           </a:solidFill>
                         </a:defRPr>
                       </a:pPr>
@@ -5923,7 +6068,7 @@
                   </a:txBody>
                   <a:tcPr>
                     <a:solidFill>
-                      <a:srgbClr val="ECF0F1"/>
+                      <a:srgbClr val="C2A78C"/>
                     </a:solidFill>
                   </a:tcPr>
                 </a:tc>
@@ -5935,7 +6080,7 @@
                       <a:pPr algn="ctr">
                         <a:defRPr sz="1200">
                           <a:solidFill>
-                            <a:srgbClr val="34495E"/>
+                            <a:srgbClr val="463C32"/>
                           </a:solidFill>
                         </a:defRPr>
                       </a:pPr>
@@ -5946,7 +6091,7 @@
                   </a:txBody>
                   <a:tcPr>
                     <a:solidFill>
-                      <a:srgbClr val="ECF0F1"/>
+                      <a:srgbClr val="C2A78C"/>
                     </a:solidFill>
                   </a:tcPr>
                 </a:tc>
@@ -5965,7 +6110,7 @@
                       <a:pPr algn="ctr">
                         <a:defRPr sz="1200">
                           <a:solidFill>
-                            <a:srgbClr val="34495E"/>
+                            <a:srgbClr val="463C32"/>
                           </a:solidFill>
                         </a:defRPr>
                       </a:pPr>
@@ -5984,7 +6129,7 @@
                       <a:pPr algn="ctr">
                         <a:defRPr sz="1200">
                           <a:solidFill>
-                            <a:srgbClr val="34495E"/>
+                            <a:srgbClr val="463C32"/>
                           </a:solidFill>
                         </a:defRPr>
                       </a:pPr>
@@ -6003,7 +6148,7 @@
                       <a:pPr algn="ctr">
                         <a:defRPr sz="1200">
                           <a:solidFill>
-                            <a:srgbClr val="34495E"/>
+                            <a:srgbClr val="463C32"/>
                           </a:solidFill>
                         </a:defRPr>
                       </a:pPr>
@@ -6022,7 +6167,7 @@
                       <a:pPr algn="ctr">
                         <a:defRPr sz="1200">
                           <a:solidFill>
-                            <a:srgbClr val="34495E"/>
+                            <a:srgbClr val="463C32"/>
                           </a:solidFill>
                         </a:defRPr>
                       </a:pPr>
@@ -6048,7 +6193,7 @@
                       <a:pPr algn="ctr">
                         <a:defRPr sz="1200">
                           <a:solidFill>
-                            <a:srgbClr val="34495E"/>
+                            <a:srgbClr val="463C32"/>
                           </a:solidFill>
                         </a:defRPr>
                       </a:pPr>
@@ -6059,7 +6204,7 @@
                   </a:txBody>
                   <a:tcPr>
                     <a:solidFill>
-                      <a:srgbClr val="ECF0F1"/>
+                      <a:srgbClr val="C2A78C"/>
                     </a:solidFill>
                   </a:tcPr>
                 </a:tc>
@@ -6071,7 +6216,7 @@
                       <a:pPr algn="ctr">
                         <a:defRPr sz="1200">
                           <a:solidFill>
-                            <a:srgbClr val="34495E"/>
+                            <a:srgbClr val="463C32"/>
                           </a:solidFill>
                         </a:defRPr>
                       </a:pPr>
@@ -6082,7 +6227,7 @@
                   </a:txBody>
                   <a:tcPr>
                     <a:solidFill>
-                      <a:srgbClr val="ECF0F1"/>
+                      <a:srgbClr val="C2A78C"/>
                     </a:solidFill>
                   </a:tcPr>
                 </a:tc>
@@ -6094,7 +6239,7 @@
                       <a:pPr algn="ctr">
                         <a:defRPr sz="1200">
                           <a:solidFill>
-                            <a:srgbClr val="34495E"/>
+                            <a:srgbClr val="463C32"/>
                           </a:solidFill>
                         </a:defRPr>
                       </a:pPr>
@@ -6105,7 +6250,7 @@
                   </a:txBody>
                   <a:tcPr>
                     <a:solidFill>
-                      <a:srgbClr val="ECF0F1"/>
+                      <a:srgbClr val="C2A78C"/>
                     </a:solidFill>
                   </a:tcPr>
                 </a:tc>
@@ -6117,7 +6262,7 @@
                       <a:pPr algn="ctr">
                         <a:defRPr sz="1200">
                           <a:solidFill>
-                            <a:srgbClr val="34495E"/>
+                            <a:srgbClr val="463C32"/>
                           </a:solidFill>
                         </a:defRPr>
                       </a:pPr>
@@ -6128,7 +6273,7 @@
                   </a:txBody>
                   <a:tcPr>
                     <a:solidFill>
-                      <a:srgbClr val="ECF0F1"/>
+                      <a:srgbClr val="C2A78C"/>
                     </a:solidFill>
                   </a:tcPr>
                 </a:tc>
@@ -6156,7 +6301,7 @@
     <p:bg>
       <p:bgPr>
         <a:solidFill>
-          <a:srgbClr val="FFFFFF"/>
+          <a:srgbClr val="F0EBE1"/>
         </a:solidFill>
         <a:effectLst/>
       </p:bgPr>
@@ -6190,11 +6335,11 @@
             <a:avLst/>
           </a:prstGeom>
           <a:solidFill>
-            <a:srgbClr val="003366"/>
+            <a:srgbClr val="65523F"/>
           </a:solidFill>
           <a:ln>
             <a:solidFill>
-              <a:srgbClr val="003366"/>
+              <a:srgbClr val="65523F"/>
             </a:solidFill>
           </a:ln>
         </p:spPr>
@@ -6250,7 +6395,7 @@
             <a:avLst/>
           </a:prstGeom>
           <a:solidFill>
-            <a:srgbClr val="2980B9"/>
+            <a:srgbClr val="CC5500"/>
           </a:solidFill>
           <a:ln>
             <a:noFill/>
@@ -6304,7 +6449,7 @@
             <a:pPr>
               <a:defRPr sz="1100" b="0">
                 <a:solidFill>
-                  <a:srgbClr val="95A5A6"/>
+                  <a:srgbClr val="786E64"/>
                 </a:solidFill>
               </a:defRPr>
             </a:pPr>
@@ -6399,7 +6544,7 @@
                   </a:txBody>
                   <a:tcPr>
                     <a:solidFill>
-                      <a:srgbClr val="003366"/>
+                      <a:srgbClr val="65523F"/>
                     </a:solidFill>
                   </a:tcPr>
                 </a:tc>
@@ -6422,7 +6567,7 @@
                   </a:txBody>
                   <a:tcPr>
                     <a:solidFill>
-                      <a:srgbClr val="003366"/>
+                      <a:srgbClr val="65523F"/>
                     </a:solidFill>
                   </a:tcPr>
                 </a:tc>
@@ -6445,7 +6590,7 @@
                   </a:txBody>
                   <a:tcPr>
                     <a:solidFill>
-                      <a:srgbClr val="003366"/>
+                      <a:srgbClr val="65523F"/>
                     </a:solidFill>
                   </a:tcPr>
                 </a:tc>
@@ -6464,7 +6609,7 @@
                       <a:pPr algn="ctr">
                         <a:defRPr sz="1200">
                           <a:solidFill>
-                            <a:srgbClr val="34495E"/>
+                            <a:srgbClr val="463C32"/>
                           </a:solidFill>
                         </a:defRPr>
                       </a:pPr>
@@ -6483,7 +6628,7 @@
                       <a:pPr algn="ctr">
                         <a:defRPr sz="1200">
                           <a:solidFill>
-                            <a:srgbClr val="34495E"/>
+                            <a:srgbClr val="463C32"/>
                           </a:solidFill>
                         </a:defRPr>
                       </a:pPr>
@@ -6502,7 +6647,7 @@
                       <a:pPr algn="ctr">
                         <a:defRPr sz="1200">
                           <a:solidFill>
-                            <a:srgbClr val="34495E"/>
+                            <a:srgbClr val="463C32"/>
                           </a:solidFill>
                         </a:defRPr>
                       </a:pPr>
@@ -6528,7 +6673,7 @@
                       <a:pPr algn="ctr">
                         <a:defRPr sz="1200">
                           <a:solidFill>
-                            <a:srgbClr val="34495E"/>
+                            <a:srgbClr val="463C32"/>
                           </a:solidFill>
                         </a:defRPr>
                       </a:pPr>
@@ -6539,7 +6684,7 @@
                   </a:txBody>
                   <a:tcPr>
                     <a:solidFill>
-                      <a:srgbClr val="ECF0F1"/>
+                      <a:srgbClr val="C2A78C"/>
                     </a:solidFill>
                   </a:tcPr>
                 </a:tc>
@@ -6551,7 +6696,7 @@
                       <a:pPr algn="ctr">
                         <a:defRPr sz="1200">
                           <a:solidFill>
-                            <a:srgbClr val="34495E"/>
+                            <a:srgbClr val="463C32"/>
                           </a:solidFill>
                         </a:defRPr>
                       </a:pPr>
@@ -6562,7 +6707,7 @@
                   </a:txBody>
                   <a:tcPr>
                     <a:solidFill>
-                      <a:srgbClr val="ECF0F1"/>
+                      <a:srgbClr val="C2A78C"/>
                     </a:solidFill>
                   </a:tcPr>
                 </a:tc>
@@ -6574,7 +6719,7 @@
                       <a:pPr algn="ctr">
                         <a:defRPr sz="1200">
                           <a:solidFill>
-                            <a:srgbClr val="34495E"/>
+                            <a:srgbClr val="463C32"/>
                           </a:solidFill>
                         </a:defRPr>
                       </a:pPr>
@@ -6585,7 +6730,7 @@
                   </a:txBody>
                   <a:tcPr>
                     <a:solidFill>
-                      <a:srgbClr val="ECF0F1"/>
+                      <a:srgbClr val="C2A78C"/>
                     </a:solidFill>
                   </a:tcPr>
                 </a:tc>
@@ -6604,7 +6749,7 @@
                       <a:pPr algn="ctr">
                         <a:defRPr sz="1200">
                           <a:solidFill>
-                            <a:srgbClr val="34495E"/>
+                            <a:srgbClr val="463C32"/>
                           </a:solidFill>
                         </a:defRPr>
                       </a:pPr>
@@ -6623,7 +6768,7 @@
                       <a:pPr algn="ctr">
                         <a:defRPr sz="1200">
                           <a:solidFill>
-                            <a:srgbClr val="34495E"/>
+                            <a:srgbClr val="463C32"/>
                           </a:solidFill>
                         </a:defRPr>
                       </a:pPr>
@@ -6642,7 +6787,7 @@
                       <a:pPr algn="ctr">
                         <a:defRPr sz="1200">
                           <a:solidFill>
-                            <a:srgbClr val="34495E"/>
+                            <a:srgbClr val="463C32"/>
                           </a:solidFill>
                         </a:defRPr>
                       </a:pPr>
@@ -6668,7 +6813,7 @@
                       <a:pPr algn="ctr">
                         <a:defRPr sz="1200">
                           <a:solidFill>
-                            <a:srgbClr val="34495E"/>
+                            <a:srgbClr val="463C32"/>
                           </a:solidFill>
                         </a:defRPr>
                       </a:pPr>
@@ -6679,7 +6824,7 @@
                   </a:txBody>
                   <a:tcPr>
                     <a:solidFill>
-                      <a:srgbClr val="ECF0F1"/>
+                      <a:srgbClr val="C2A78C"/>
                     </a:solidFill>
                   </a:tcPr>
                 </a:tc>
@@ -6691,7 +6836,7 @@
                       <a:pPr algn="ctr">
                         <a:defRPr sz="1200">
                           <a:solidFill>
-                            <a:srgbClr val="34495E"/>
+                            <a:srgbClr val="463C32"/>
                           </a:solidFill>
                         </a:defRPr>
                       </a:pPr>
@@ -6702,7 +6847,7 @@
                   </a:txBody>
                   <a:tcPr>
                     <a:solidFill>
-                      <a:srgbClr val="ECF0F1"/>
+                      <a:srgbClr val="C2A78C"/>
                     </a:solidFill>
                   </a:tcPr>
                 </a:tc>
@@ -6714,7 +6859,7 @@
                       <a:pPr algn="ctr">
                         <a:defRPr sz="1200">
                           <a:solidFill>
-                            <a:srgbClr val="34495E"/>
+                            <a:srgbClr val="463C32"/>
                           </a:solidFill>
                         </a:defRPr>
                       </a:pPr>
@@ -6725,7 +6870,7 @@
                   </a:txBody>
                   <a:tcPr>
                     <a:solidFill>
-                      <a:srgbClr val="ECF0F1"/>
+                      <a:srgbClr val="C2A78C"/>
                     </a:solidFill>
                   </a:tcPr>
                 </a:tc>
@@ -6744,7 +6889,7 @@
                       <a:pPr algn="ctr">
                         <a:defRPr sz="1200">
                           <a:solidFill>
-                            <a:srgbClr val="34495E"/>
+                            <a:srgbClr val="463C32"/>
                           </a:solidFill>
                         </a:defRPr>
                       </a:pPr>
@@ -6763,7 +6908,7 @@
                       <a:pPr algn="ctr">
                         <a:defRPr sz="1200">
                           <a:solidFill>
-                            <a:srgbClr val="34495E"/>
+                            <a:srgbClr val="463C32"/>
                           </a:solidFill>
                         </a:defRPr>
                       </a:pPr>
@@ -6782,7 +6927,7 @@
                       <a:pPr algn="ctr">
                         <a:defRPr sz="1200">
                           <a:solidFill>
-                            <a:srgbClr val="34495E"/>
+                            <a:srgbClr val="463C32"/>
                           </a:solidFill>
                         </a:defRPr>
                       </a:pPr>
@@ -6817,7 +6962,7 @@
     <p:bg>
       <p:bgPr>
         <a:solidFill>
-          <a:srgbClr val="FFFFFF"/>
+          <a:srgbClr val="F0EBE1"/>
         </a:solidFill>
         <a:effectLst/>
       </p:bgPr>
@@ -6851,11 +6996,11 @@
             <a:avLst/>
           </a:prstGeom>
           <a:solidFill>
-            <a:srgbClr val="003366"/>
+            <a:srgbClr val="65523F"/>
           </a:solidFill>
           <a:ln>
             <a:solidFill>
-              <a:srgbClr val="003366"/>
+              <a:srgbClr val="65523F"/>
             </a:solidFill>
           </a:ln>
         </p:spPr>
@@ -6911,7 +7056,7 @@
             <a:avLst/>
           </a:prstGeom>
           <a:solidFill>
-            <a:srgbClr val="2980B9"/>
+            <a:srgbClr val="CC5500"/>
           </a:solidFill>
           <a:ln>
             <a:noFill/>
@@ -6965,7 +7110,7 @@
             <a:pPr>
               <a:defRPr sz="1100" b="0">
                 <a:solidFill>
-                  <a:srgbClr val="95A5A6"/>
+                  <a:srgbClr val="786E64"/>
                 </a:solidFill>
               </a:defRPr>
             </a:pPr>
@@ -7007,8 +7152,8 @@
         </p:nvSpPr>
         <p:spPr>
           <a:xfrm>
-            <a:off x="731520" y="4389120"/>
-            <a:ext cx="7680960" cy="2103120"/>
+            <a:off x="731520" y="5171823"/>
+            <a:ext cx="7680960" cy="600164"/>
           </a:xfrm>
           <a:prstGeom prst="rect">
             <a:avLst/>
@@ -7024,21 +7169,49 @@
             <a:pPr>
               <a:defRPr sz="1100" b="1">
                 <a:solidFill>
-                  <a:srgbClr val="003366"/>
+                  <a:srgbClr val="65523F"/>
                 </a:solidFill>
               </a:defRPr>
             </a:pPr>
             <a:r>
-              <a:t>Ana Silva (€182): Maior diversidade • Roberto Lima (€200): Cliente VIP</a:t>
-            </a:r>
-            <a:br/>
-            <a:r>
-              <a:t>Maria Ferreira (€70): Básico • John Smith (€50): Mínimo</a:t>
-            </a:r>
-            <a:br/>
-            <a:r>
-              <a:t>Carlos Sousa (€0): Hospedagem simples</a:t>
-            </a:r>
+              <a:rPr dirty="0"/>
+              <a:t>Ana Silva (€182</a:t>
+            </a:r>
+            <a:r>
+              <a:rPr lang="pt-PT" dirty="0"/>
+              <a:t>)</a:t>
+            </a:r>
+            <a:r>
+              <a:rPr dirty="0"/>
+              <a:t> • Roberto Lima (€200)</a:t>
+            </a:r>
+            <a:br>
+              <a:rPr dirty="0"/>
+            </a:br>
+            <a:r>
+              <a:rPr dirty="0"/>
+              <a:t>Maria Ferreira (€70)</a:t>
+            </a:r>
+            <a:r>
+              <a:rPr lang="pt-PT" dirty="0"/>
+              <a:t> </a:t>
+            </a:r>
+            <a:r>
+              <a:rPr dirty="0"/>
+              <a:t>• John Smith (€50)</a:t>
+            </a:r>
+            <a:br>
+              <a:rPr dirty="0"/>
+            </a:br>
+            <a:r>
+              <a:rPr dirty="0"/>
+              <a:t>Carlos Sousa (€0</a:t>
+            </a:r>
+            <a:r>
+              <a:rPr lang="pt-PT" dirty="0"/>
+              <a:t>)</a:t>
+            </a:r>
+            <a:endParaRPr dirty="0"/>
           </a:p>
         </p:txBody>
       </p:sp>
@@ -7056,7 +7229,7 @@
     <p:bg>
       <p:bgPr>
         <a:solidFill>
-          <a:srgbClr val="FFFFFF"/>
+          <a:srgbClr val="F0EBE1"/>
         </a:solidFill>
         <a:effectLst/>
       </p:bgPr>
@@ -7090,11 +7263,11 @@
             <a:avLst/>
           </a:prstGeom>
           <a:solidFill>
-            <a:srgbClr val="003366"/>
+            <a:srgbClr val="65523F"/>
           </a:solidFill>
           <a:ln>
             <a:solidFill>
-              <a:srgbClr val="003366"/>
+              <a:srgbClr val="65523F"/>
             </a:solidFill>
           </a:ln>
         </p:spPr>
@@ -7150,7 +7323,7 @@
             <a:avLst/>
           </a:prstGeom>
           <a:solidFill>
-            <a:srgbClr val="2980B9"/>
+            <a:srgbClr val="CC5500"/>
           </a:solidFill>
           <a:ln>
             <a:noFill/>
@@ -7204,7 +7377,7 @@
             <a:pPr>
               <a:defRPr sz="1200" b="0">
                 <a:solidFill>
-                  <a:srgbClr val="95A5A6"/>
+                  <a:srgbClr val="786E64"/>
                 </a:solidFill>
               </a:defRPr>
             </a:pPr>
@@ -7245,7 +7418,7 @@
               </a:spcAft>
               <a:defRPr sz="1600">
                 <a:solidFill>
-                  <a:srgbClr val="34495E"/>
+                  <a:srgbClr val="463C32"/>
                 </a:solidFill>
               </a:defRPr>
             </a:pPr>
@@ -7263,7 +7436,7 @@
               </a:spcAft>
               <a:defRPr sz="1600">
                 <a:solidFill>
-                  <a:srgbClr val="34495E"/>
+                  <a:srgbClr val="463C32"/>
                 </a:solidFill>
               </a:defRPr>
             </a:pPr>
@@ -7281,7 +7454,7 @@
               </a:spcAft>
               <a:defRPr sz="1600">
                 <a:solidFill>
-                  <a:srgbClr val="34495E"/>
+                  <a:srgbClr val="463C32"/>
                 </a:solidFill>
               </a:defRPr>
             </a:pPr>
@@ -7299,7 +7472,7 @@
               </a:spcAft>
               <a:defRPr sz="1600">
                 <a:solidFill>
-                  <a:srgbClr val="34495E"/>
+                  <a:srgbClr val="463C32"/>
                 </a:solidFill>
               </a:defRPr>
             </a:pPr>
@@ -7317,7 +7490,7 @@
               </a:spcAft>
               <a:defRPr sz="1600">
                 <a:solidFill>
-                  <a:srgbClr val="34495E"/>
+                  <a:srgbClr val="463C32"/>
                 </a:solidFill>
               </a:defRPr>
             </a:pPr>
@@ -7341,7 +7514,7 @@
     <p:bg>
       <p:bgPr>
         <a:solidFill>
-          <a:srgbClr val="FFFFFF"/>
+          <a:srgbClr val="F0EBE1"/>
         </a:solidFill>
         <a:effectLst/>
       </p:bgPr>
@@ -7375,11 +7548,11 @@
             <a:avLst/>
           </a:prstGeom>
           <a:solidFill>
-            <a:srgbClr val="003366"/>
+            <a:srgbClr val="65523F"/>
           </a:solidFill>
           <a:ln>
             <a:solidFill>
-              <a:srgbClr val="003366"/>
+              <a:srgbClr val="65523F"/>
             </a:solidFill>
           </a:ln>
         </p:spPr>
@@ -7435,7 +7608,7 @@
             <a:avLst/>
           </a:prstGeom>
           <a:solidFill>
-            <a:srgbClr val="2980B9"/>
+            <a:srgbClr val="CC5500"/>
           </a:solidFill>
           <a:ln>
             <a:noFill/>
@@ -7489,7 +7662,7 @@
             <a:pPr>
               <a:defRPr sz="1200" b="0">
                 <a:solidFill>
-                  <a:srgbClr val="95A5A6"/>
+                  <a:srgbClr val="786E64"/>
                 </a:solidFill>
               </a:defRPr>
             </a:pPr>
@@ -7530,7 +7703,7 @@
               </a:spcAft>
               <a:defRPr sz="1600">
                 <a:solidFill>
-                  <a:srgbClr val="34495E"/>
+                  <a:srgbClr val="463C32"/>
                 </a:solidFill>
               </a:defRPr>
             </a:pPr>
@@ -7548,7 +7721,7 @@
               </a:spcAft>
               <a:defRPr sz="1600">
                 <a:solidFill>
-                  <a:srgbClr val="34495E"/>
+                  <a:srgbClr val="463C32"/>
                 </a:solidFill>
               </a:defRPr>
             </a:pPr>
@@ -7566,7 +7739,7 @@
               </a:spcAft>
               <a:defRPr sz="1600">
                 <a:solidFill>
-                  <a:srgbClr val="34495E"/>
+                  <a:srgbClr val="463C32"/>
                 </a:solidFill>
               </a:defRPr>
             </a:pPr>
@@ -7584,7 +7757,7 @@
               </a:spcAft>
               <a:defRPr sz="1600">
                 <a:solidFill>
-                  <a:srgbClr val="34495E"/>
+                  <a:srgbClr val="463C32"/>
                 </a:solidFill>
               </a:defRPr>
             </a:pPr>
@@ -7602,7 +7775,7 @@
               </a:spcAft>
               <a:defRPr sz="1600">
                 <a:solidFill>
-                  <a:srgbClr val="34495E"/>
+                  <a:srgbClr val="463C32"/>
                 </a:solidFill>
               </a:defRPr>
             </a:pPr>
@@ -7626,7 +7799,7 @@
     <p:bg>
       <p:bgPr>
         <a:solidFill>
-          <a:srgbClr val="FFFFFF"/>
+          <a:srgbClr val="F0EBE1"/>
         </a:solidFill>
         <a:effectLst/>
       </p:bgPr>
@@ -7660,11 +7833,11 @@
             <a:avLst/>
           </a:prstGeom>
           <a:solidFill>
-            <a:srgbClr val="003366"/>
+            <a:srgbClr val="65523F"/>
           </a:solidFill>
           <a:ln>
             <a:solidFill>
-              <a:srgbClr val="003366"/>
+              <a:srgbClr val="65523F"/>
             </a:solidFill>
           </a:ln>
         </p:spPr>
@@ -7720,7 +7893,7 @@
             <a:avLst/>
           </a:prstGeom>
           <a:solidFill>
-            <a:srgbClr val="2980B9"/>
+            <a:srgbClr val="CC5500"/>
           </a:solidFill>
           <a:ln>
             <a:noFill/>
@@ -7774,7 +7947,7 @@
             <a:pPr>
               <a:defRPr sz="1100" b="0">
                 <a:solidFill>
-                  <a:srgbClr val="95A5A6"/>
+                  <a:srgbClr val="786E64"/>
                 </a:solidFill>
               </a:defRPr>
             </a:pPr>
@@ -7845,7 +8018,7 @@
                   </a:txBody>
                   <a:tcPr>
                     <a:solidFill>
-                      <a:srgbClr val="003366"/>
+                      <a:srgbClr val="65523F"/>
                     </a:solidFill>
                   </a:tcPr>
                 </a:tc>
@@ -7868,7 +8041,7 @@
                   </a:txBody>
                   <a:tcPr>
                     <a:solidFill>
-                      <a:srgbClr val="003366"/>
+                      <a:srgbClr val="65523F"/>
                     </a:solidFill>
                   </a:tcPr>
                 </a:tc>
@@ -7891,7 +8064,7 @@
                   </a:txBody>
                   <a:tcPr>
                     <a:solidFill>
-                      <a:srgbClr val="003366"/>
+                      <a:srgbClr val="65523F"/>
                     </a:solidFill>
                   </a:tcPr>
                 </a:tc>
@@ -7910,7 +8083,7 @@
                       <a:pPr algn="ctr">
                         <a:defRPr sz="1200">
                           <a:solidFill>
-                            <a:srgbClr val="34495E"/>
+                            <a:srgbClr val="463C32"/>
                           </a:solidFill>
                         </a:defRPr>
                       </a:pPr>
@@ -7929,7 +8102,7 @@
                       <a:pPr algn="ctr">
                         <a:defRPr sz="1200">
                           <a:solidFill>
-                            <a:srgbClr val="34495E"/>
+                            <a:srgbClr val="463C32"/>
                           </a:solidFill>
                         </a:defRPr>
                       </a:pPr>
@@ -7948,7 +8121,7 @@
                       <a:pPr algn="ctr">
                         <a:defRPr sz="1200">
                           <a:solidFill>
-                            <a:srgbClr val="34495E"/>
+                            <a:srgbClr val="463C32"/>
                           </a:solidFill>
                         </a:defRPr>
                       </a:pPr>
@@ -7974,7 +8147,7 @@
                       <a:pPr algn="ctr">
                         <a:defRPr sz="1200">
                           <a:solidFill>
-                            <a:srgbClr val="34495E"/>
+                            <a:srgbClr val="463C32"/>
                           </a:solidFill>
                         </a:defRPr>
                       </a:pPr>
@@ -7985,7 +8158,7 @@
                   </a:txBody>
                   <a:tcPr>
                     <a:solidFill>
-                      <a:srgbClr val="ECF0F1"/>
+                      <a:srgbClr val="C2A78C"/>
                     </a:solidFill>
                   </a:tcPr>
                 </a:tc>
@@ -7997,7 +8170,7 @@
                       <a:pPr algn="ctr">
                         <a:defRPr sz="1200">
                           <a:solidFill>
-                            <a:srgbClr val="34495E"/>
+                            <a:srgbClr val="463C32"/>
                           </a:solidFill>
                         </a:defRPr>
                       </a:pPr>
@@ -8008,7 +8181,7 @@
                   </a:txBody>
                   <a:tcPr>
                     <a:solidFill>
-                      <a:srgbClr val="ECF0F1"/>
+                      <a:srgbClr val="C2A78C"/>
                     </a:solidFill>
                   </a:tcPr>
                 </a:tc>
@@ -8020,7 +8193,7 @@
                       <a:pPr algn="ctr">
                         <a:defRPr sz="1200">
                           <a:solidFill>
-                            <a:srgbClr val="34495E"/>
+                            <a:srgbClr val="463C32"/>
                           </a:solidFill>
                         </a:defRPr>
                       </a:pPr>
@@ -8031,7 +8204,7 @@
                   </a:txBody>
                   <a:tcPr>
                     <a:solidFill>
-                      <a:srgbClr val="ECF0F1"/>
+                      <a:srgbClr val="C2A78C"/>
                     </a:solidFill>
                   </a:tcPr>
                 </a:tc>
@@ -8050,7 +8223,7 @@
                       <a:pPr algn="ctr">
                         <a:defRPr sz="1200">
                           <a:solidFill>
-                            <a:srgbClr val="34495E"/>
+                            <a:srgbClr val="463C32"/>
                           </a:solidFill>
                         </a:defRPr>
                       </a:pPr>
@@ -8069,7 +8242,7 @@
                       <a:pPr algn="ctr">
                         <a:defRPr sz="1200">
                           <a:solidFill>
-                            <a:srgbClr val="34495E"/>
+                            <a:srgbClr val="463C32"/>
                           </a:solidFill>
                         </a:defRPr>
                       </a:pPr>
@@ -8088,7 +8261,7 @@
                       <a:pPr algn="ctr">
                         <a:defRPr sz="1200">
                           <a:solidFill>
-                            <a:srgbClr val="34495E"/>
+                            <a:srgbClr val="463C32"/>
                           </a:solidFill>
                         </a:defRPr>
                       </a:pPr>
@@ -8114,7 +8287,7 @@
                       <a:pPr algn="ctr">
                         <a:defRPr sz="1200">
                           <a:solidFill>
-                            <a:srgbClr val="34495E"/>
+                            <a:srgbClr val="463C32"/>
                           </a:solidFill>
                         </a:defRPr>
                       </a:pPr>
@@ -8125,7 +8298,7 @@
                   </a:txBody>
                   <a:tcPr>
                     <a:solidFill>
-                      <a:srgbClr val="ECF0F1"/>
+                      <a:srgbClr val="C2A78C"/>
                     </a:solidFill>
                   </a:tcPr>
                 </a:tc>
@@ -8137,7 +8310,7 @@
                       <a:pPr algn="ctr">
                         <a:defRPr sz="1200">
                           <a:solidFill>
-                            <a:srgbClr val="34495E"/>
+                            <a:srgbClr val="463C32"/>
                           </a:solidFill>
                         </a:defRPr>
                       </a:pPr>
@@ -8148,7 +8321,7 @@
                   </a:txBody>
                   <a:tcPr>
                     <a:solidFill>
-                      <a:srgbClr val="ECF0F1"/>
+                      <a:srgbClr val="C2A78C"/>
                     </a:solidFill>
                   </a:tcPr>
                 </a:tc>
@@ -8160,7 +8333,7 @@
                       <a:pPr algn="ctr">
                         <a:defRPr sz="1200">
                           <a:solidFill>
-                            <a:srgbClr val="34495E"/>
+                            <a:srgbClr val="463C32"/>
                           </a:solidFill>
                         </a:defRPr>
                       </a:pPr>
@@ -8171,7 +8344,7 @@
                   </a:txBody>
                   <a:tcPr>
                     <a:solidFill>
-                      <a:srgbClr val="ECF0F1"/>
+                      <a:srgbClr val="C2A78C"/>
                     </a:solidFill>
                   </a:tcPr>
                 </a:tc>
@@ -8190,7 +8363,7 @@
                       <a:pPr algn="ctr">
                         <a:defRPr sz="1200">
                           <a:solidFill>
-                            <a:srgbClr val="34495E"/>
+                            <a:srgbClr val="463C32"/>
                           </a:solidFill>
                         </a:defRPr>
                       </a:pPr>
@@ -8209,7 +8382,7 @@
                       <a:pPr algn="ctr">
                         <a:defRPr sz="1200">
                           <a:solidFill>
-                            <a:srgbClr val="34495E"/>
+                            <a:srgbClr val="463C32"/>
                           </a:solidFill>
                         </a:defRPr>
                       </a:pPr>
@@ -8228,7 +8401,7 @@
                       <a:pPr algn="ctr">
                         <a:defRPr sz="1200">
                           <a:solidFill>
-                            <a:srgbClr val="34495E"/>
+                            <a:srgbClr val="463C32"/>
                           </a:solidFill>
                         </a:defRPr>
                       </a:pPr>
@@ -8263,7 +8436,7 @@
     <p:bg>
       <p:bgPr>
         <a:solidFill>
-          <a:srgbClr val="FFFFFF"/>
+          <a:srgbClr val="F0EBE1"/>
         </a:solidFill>
         <a:effectLst/>
       </p:bgPr>
@@ -8297,11 +8470,11 @@
             <a:avLst/>
           </a:prstGeom>
           <a:solidFill>
-            <a:srgbClr val="003366"/>
+            <a:srgbClr val="65523F"/>
           </a:solidFill>
           <a:ln>
             <a:solidFill>
-              <a:srgbClr val="003366"/>
+              <a:srgbClr val="65523F"/>
             </a:solidFill>
           </a:ln>
         </p:spPr>
@@ -8357,7 +8530,7 @@
             <a:avLst/>
           </a:prstGeom>
           <a:solidFill>
-            <a:srgbClr val="2980B9"/>
+            <a:srgbClr val="CC5500"/>
           </a:solidFill>
           <a:ln>
             <a:noFill/>
@@ -8411,7 +8584,7 @@
             <a:pPr>
               <a:defRPr sz="1100" b="0">
                 <a:solidFill>
-                  <a:srgbClr val="95A5A6"/>
+                  <a:srgbClr val="786E64"/>
                 </a:solidFill>
               </a:defRPr>
             </a:pPr>
@@ -8452,7 +8625,7 @@
               </a:spcAft>
               <a:defRPr sz="1600">
                 <a:solidFill>
-                  <a:srgbClr val="34495E"/>
+                  <a:srgbClr val="463C32"/>
                 </a:solidFill>
               </a:defRPr>
             </a:pPr>
@@ -8470,7 +8643,7 @@
               </a:spcAft>
               <a:defRPr sz="1600">
                 <a:solidFill>
-                  <a:srgbClr val="34495E"/>
+                  <a:srgbClr val="463C32"/>
                 </a:solidFill>
               </a:defRPr>
             </a:pPr>
@@ -8488,7 +8661,7 @@
               </a:spcAft>
               <a:defRPr sz="1600">
                 <a:solidFill>
-                  <a:srgbClr val="34495E"/>
+                  <a:srgbClr val="463C32"/>
                 </a:solidFill>
               </a:defRPr>
             </a:pPr>
@@ -8506,7 +8679,7 @@
               </a:spcAft>
               <a:defRPr sz="1600">
                 <a:solidFill>
-                  <a:srgbClr val="34495E"/>
+                  <a:srgbClr val="463C32"/>
                 </a:solidFill>
               </a:defRPr>
             </a:pPr>
@@ -8524,7 +8697,7 @@
               </a:spcAft>
               <a:defRPr sz="1600">
                 <a:solidFill>
-                  <a:srgbClr val="34495E"/>
+                  <a:srgbClr val="463C32"/>
                 </a:solidFill>
               </a:defRPr>
             </a:pPr>
@@ -8548,7 +8721,7 @@
     <p:bg>
       <p:bgPr>
         <a:solidFill>
-          <a:srgbClr val="FFFFFF"/>
+          <a:srgbClr val="F0EBE1"/>
         </a:solidFill>
         <a:effectLst/>
       </p:bgPr>
@@ -8582,11 +8755,11 @@
             <a:avLst/>
           </a:prstGeom>
           <a:solidFill>
-            <a:srgbClr val="003366"/>
+            <a:srgbClr val="65523F"/>
           </a:solidFill>
           <a:ln>
             <a:solidFill>
-              <a:srgbClr val="003366"/>
+              <a:srgbClr val="65523F"/>
             </a:solidFill>
           </a:ln>
         </p:spPr>
@@ -8642,7 +8815,7 @@
             <a:avLst/>
           </a:prstGeom>
           <a:solidFill>
-            <a:srgbClr val="2980B9"/>
+            <a:srgbClr val="CC5500"/>
           </a:solidFill>
           <a:ln>
             <a:noFill/>
@@ -8696,7 +8869,7 @@
             <a:pPr>
               <a:defRPr sz="1200" b="0">
                 <a:solidFill>
-                  <a:srgbClr val="95A5A6"/>
+                  <a:srgbClr val="786E64"/>
                 </a:solidFill>
               </a:defRPr>
             </a:pPr>
@@ -8767,7 +8940,7 @@
                   </a:txBody>
                   <a:tcPr>
                     <a:solidFill>
-                      <a:srgbClr val="003366"/>
+                      <a:srgbClr val="65523F"/>
                     </a:solidFill>
                   </a:tcPr>
                 </a:tc>
@@ -8790,7 +8963,7 @@
                   </a:txBody>
                   <a:tcPr>
                     <a:solidFill>
-                      <a:srgbClr val="003366"/>
+                      <a:srgbClr val="65523F"/>
                     </a:solidFill>
                   </a:tcPr>
                 </a:tc>
@@ -8813,7 +8986,7 @@
                   </a:txBody>
                   <a:tcPr>
                     <a:solidFill>
-                      <a:srgbClr val="003366"/>
+                      <a:srgbClr val="65523F"/>
                     </a:solidFill>
                   </a:tcPr>
                 </a:tc>
@@ -8832,7 +9005,7 @@
                       <a:pPr algn="ctr">
                         <a:defRPr sz="1200">
                           <a:solidFill>
-                            <a:srgbClr val="34495E"/>
+                            <a:srgbClr val="463C32"/>
                           </a:solidFill>
                         </a:defRPr>
                       </a:pPr>
@@ -8851,7 +9024,7 @@
                       <a:pPr algn="ctr">
                         <a:defRPr sz="1200">
                           <a:solidFill>
-                            <a:srgbClr val="34495E"/>
+                            <a:srgbClr val="463C32"/>
                           </a:solidFill>
                         </a:defRPr>
                       </a:pPr>
@@ -8870,7 +9043,7 @@
                       <a:pPr algn="ctr">
                         <a:defRPr sz="1200">
                           <a:solidFill>
-                            <a:srgbClr val="34495E"/>
+                            <a:srgbClr val="463C32"/>
                           </a:solidFill>
                         </a:defRPr>
                       </a:pPr>
@@ -8896,7 +9069,7 @@
                       <a:pPr algn="ctr">
                         <a:defRPr sz="1200">
                           <a:solidFill>
-                            <a:srgbClr val="34495E"/>
+                            <a:srgbClr val="463C32"/>
                           </a:solidFill>
                         </a:defRPr>
                       </a:pPr>
@@ -8907,7 +9080,7 @@
                   </a:txBody>
                   <a:tcPr>
                     <a:solidFill>
-                      <a:srgbClr val="ECF0F1"/>
+                      <a:srgbClr val="C2A78C"/>
                     </a:solidFill>
                   </a:tcPr>
                 </a:tc>
@@ -8919,7 +9092,7 @@
                       <a:pPr algn="ctr">
                         <a:defRPr sz="1200">
                           <a:solidFill>
-                            <a:srgbClr val="34495E"/>
+                            <a:srgbClr val="463C32"/>
                           </a:solidFill>
                         </a:defRPr>
                       </a:pPr>
@@ -8930,7 +9103,7 @@
                   </a:txBody>
                   <a:tcPr>
                     <a:solidFill>
-                      <a:srgbClr val="ECF0F1"/>
+                      <a:srgbClr val="C2A78C"/>
                     </a:solidFill>
                   </a:tcPr>
                 </a:tc>
@@ -8942,7 +9115,7 @@
                       <a:pPr algn="ctr">
                         <a:defRPr sz="1200">
                           <a:solidFill>
-                            <a:srgbClr val="34495E"/>
+                            <a:srgbClr val="463C32"/>
                           </a:solidFill>
                         </a:defRPr>
                       </a:pPr>
@@ -8953,7 +9126,7 @@
                   </a:txBody>
                   <a:tcPr>
                     <a:solidFill>
-                      <a:srgbClr val="ECF0F1"/>
+                      <a:srgbClr val="C2A78C"/>
                     </a:solidFill>
                   </a:tcPr>
                 </a:tc>
@@ -8972,7 +9145,7 @@
                       <a:pPr algn="ctr">
                         <a:defRPr sz="1200">
                           <a:solidFill>
-                            <a:srgbClr val="34495E"/>
+                            <a:srgbClr val="463C32"/>
                           </a:solidFill>
                         </a:defRPr>
                       </a:pPr>
@@ -8991,7 +9164,7 @@
                       <a:pPr algn="ctr">
                         <a:defRPr sz="1200">
                           <a:solidFill>
-                            <a:srgbClr val="34495E"/>
+                            <a:srgbClr val="463C32"/>
                           </a:solidFill>
                         </a:defRPr>
                       </a:pPr>
@@ -9010,7 +9183,7 @@
                       <a:pPr algn="ctr">
                         <a:defRPr sz="1200">
                           <a:solidFill>
-                            <a:srgbClr val="34495E"/>
+                            <a:srgbClr val="463C32"/>
                           </a:solidFill>
                         </a:defRPr>
                       </a:pPr>
@@ -9036,7 +9209,7 @@
                       <a:pPr algn="ctr">
                         <a:defRPr sz="1200">
                           <a:solidFill>
-                            <a:srgbClr val="34495E"/>
+                            <a:srgbClr val="463C32"/>
                           </a:solidFill>
                         </a:defRPr>
                       </a:pPr>
@@ -9047,7 +9220,7 @@
                   </a:txBody>
                   <a:tcPr>
                     <a:solidFill>
-                      <a:srgbClr val="ECF0F1"/>
+                      <a:srgbClr val="C2A78C"/>
                     </a:solidFill>
                   </a:tcPr>
                 </a:tc>
@@ -9059,7 +9232,7 @@
                       <a:pPr algn="ctr">
                         <a:defRPr sz="1200">
                           <a:solidFill>
-                            <a:srgbClr val="34495E"/>
+                            <a:srgbClr val="463C32"/>
                           </a:solidFill>
                         </a:defRPr>
                       </a:pPr>
@@ -9070,7 +9243,7 @@
                   </a:txBody>
                   <a:tcPr>
                     <a:solidFill>
-                      <a:srgbClr val="ECF0F1"/>
+                      <a:srgbClr val="C2A78C"/>
                     </a:solidFill>
                   </a:tcPr>
                 </a:tc>
@@ -9082,7 +9255,7 @@
                       <a:pPr algn="ctr">
                         <a:defRPr sz="1200">
                           <a:solidFill>
-                            <a:srgbClr val="34495E"/>
+                            <a:srgbClr val="463C32"/>
                           </a:solidFill>
                         </a:defRPr>
                       </a:pPr>
@@ -9093,7 +9266,7 @@
                   </a:txBody>
                   <a:tcPr>
                     <a:solidFill>
-                      <a:srgbClr val="ECF0F1"/>
+                      <a:srgbClr val="C2A78C"/>
                     </a:solidFill>
                   </a:tcPr>
                 </a:tc>
@@ -9121,7 +9294,7 @@
     <p:bg>
       <p:bgPr>
         <a:solidFill>
-          <a:srgbClr val="FFFFFF"/>
+          <a:srgbClr val="F0EBE1"/>
         </a:solidFill>
         <a:effectLst/>
       </p:bgPr>
@@ -9155,11 +9328,11 @@
             <a:avLst/>
           </a:prstGeom>
           <a:solidFill>
-            <a:srgbClr val="003366"/>
+            <a:srgbClr val="65523F"/>
           </a:solidFill>
           <a:ln>
             <a:solidFill>
-              <a:srgbClr val="003366"/>
+              <a:srgbClr val="65523F"/>
             </a:solidFill>
           </a:ln>
         </p:spPr>
@@ -9215,7 +9388,7 @@
             <a:avLst/>
           </a:prstGeom>
           <a:solidFill>
-            <a:srgbClr val="2980B9"/>
+            <a:srgbClr val="CC5500"/>
           </a:solidFill>
           <a:ln>
             <a:noFill/>
@@ -9269,7 +9442,7 @@
             <a:pPr>
               <a:defRPr sz="1200" b="0">
                 <a:solidFill>
-                  <a:srgbClr val="95A5A6"/>
+                  <a:srgbClr val="786E64"/>
                 </a:solidFill>
               </a:defRPr>
             </a:pPr>
@@ -9294,11 +9467,11 @@
             <a:avLst/>
           </a:prstGeom>
           <a:solidFill>
-            <a:srgbClr val="ECF0F1"/>
+            <a:srgbClr val="C2A78C"/>
           </a:solidFill>
           <a:ln>
             <a:solidFill>
-              <a:srgbClr val="95A5A6"/>
+              <a:srgbClr val="65523F"/>
             </a:solidFill>
           </a:ln>
         </p:spPr>
@@ -9326,7 +9499,7 @@
               </a:spcBef>
               <a:defRPr sz="1000">
                 <a:solidFill>
-                  <a:srgbClr val="34495E"/>
+                  <a:srgbClr val="463C32"/>
                 </a:solidFill>
                 <a:latin typeface="Courier New"/>
               </a:defRPr>
@@ -9394,7 +9567,7 @@
             <a:pPr>
               <a:defRPr sz="1100" b="1">
                 <a:solidFill>
-                  <a:srgbClr val="2980B9"/>
+                  <a:srgbClr val="CC5500"/>
                 </a:solidFill>
               </a:defRPr>
             </a:pPr>
@@ -9418,7 +9591,7 @@
     <p:bg>
       <p:bgPr>
         <a:solidFill>
-          <a:srgbClr val="FFFFFF"/>
+          <a:srgbClr val="F0EBE1"/>
         </a:solidFill>
         <a:effectLst/>
       </p:bgPr>
@@ -9452,11 +9625,11 @@
             <a:avLst/>
           </a:prstGeom>
           <a:solidFill>
-            <a:srgbClr val="003366"/>
+            <a:srgbClr val="65523F"/>
           </a:solidFill>
           <a:ln>
             <a:solidFill>
-              <a:srgbClr val="003366"/>
+              <a:srgbClr val="65523F"/>
             </a:solidFill>
           </a:ln>
         </p:spPr>
@@ -9512,7 +9685,7 @@
             <a:avLst/>
           </a:prstGeom>
           <a:solidFill>
-            <a:srgbClr val="2980B9"/>
+            <a:srgbClr val="CC5500"/>
           </a:solidFill>
           <a:ln>
             <a:noFill/>
@@ -9566,7 +9739,7 @@
             <a:pPr>
               <a:defRPr sz="1200" b="0">
                 <a:solidFill>
-                  <a:srgbClr val="95A5A6"/>
+                  <a:srgbClr val="786E64"/>
                 </a:solidFill>
               </a:defRPr>
             </a:pPr>
@@ -9637,7 +9810,7 @@
                   </a:txBody>
                   <a:tcPr>
                     <a:solidFill>
-                      <a:srgbClr val="003366"/>
+                      <a:srgbClr val="65523F"/>
                     </a:solidFill>
                   </a:tcPr>
                 </a:tc>
@@ -9660,7 +9833,7 @@
                   </a:txBody>
                   <a:tcPr>
                     <a:solidFill>
-                      <a:srgbClr val="003366"/>
+                      <a:srgbClr val="65523F"/>
                     </a:solidFill>
                   </a:tcPr>
                 </a:tc>
@@ -9683,7 +9856,7 @@
                   </a:txBody>
                   <a:tcPr>
                     <a:solidFill>
-                      <a:srgbClr val="003366"/>
+                      <a:srgbClr val="65523F"/>
                     </a:solidFill>
                   </a:tcPr>
                 </a:tc>
@@ -9702,7 +9875,7 @@
                       <a:pPr algn="ctr">
                         <a:defRPr sz="1200">
                           <a:solidFill>
-                            <a:srgbClr val="34495E"/>
+                            <a:srgbClr val="463C32"/>
                           </a:solidFill>
                         </a:defRPr>
                       </a:pPr>
@@ -9721,7 +9894,7 @@
                       <a:pPr algn="ctr">
                         <a:defRPr sz="1200">
                           <a:solidFill>
-                            <a:srgbClr val="34495E"/>
+                            <a:srgbClr val="463C32"/>
                           </a:solidFill>
                         </a:defRPr>
                       </a:pPr>
@@ -9740,7 +9913,7 @@
                       <a:pPr algn="ctr">
                         <a:defRPr sz="1200">
                           <a:solidFill>
-                            <a:srgbClr val="34495E"/>
+                            <a:srgbClr val="463C32"/>
                           </a:solidFill>
                         </a:defRPr>
                       </a:pPr>
@@ -9766,7 +9939,7 @@
                       <a:pPr algn="ctr">
                         <a:defRPr sz="1200">
                           <a:solidFill>
-                            <a:srgbClr val="34495E"/>
+                            <a:srgbClr val="463C32"/>
                           </a:solidFill>
                         </a:defRPr>
                       </a:pPr>
@@ -9777,7 +9950,7 @@
                   </a:txBody>
                   <a:tcPr>
                     <a:solidFill>
-                      <a:srgbClr val="ECF0F1"/>
+                      <a:srgbClr val="C2A78C"/>
                     </a:solidFill>
                   </a:tcPr>
                 </a:tc>
@@ -9789,7 +9962,7 @@
                       <a:pPr algn="ctr">
                         <a:defRPr sz="1200">
                           <a:solidFill>
-                            <a:srgbClr val="34495E"/>
+                            <a:srgbClr val="463C32"/>
                           </a:solidFill>
                         </a:defRPr>
                       </a:pPr>
@@ -9800,7 +9973,7 @@
                   </a:txBody>
                   <a:tcPr>
                     <a:solidFill>
-                      <a:srgbClr val="ECF0F1"/>
+                      <a:srgbClr val="C2A78C"/>
                     </a:solidFill>
                   </a:tcPr>
                 </a:tc>
@@ -9812,7 +9985,7 @@
                       <a:pPr algn="ctr">
                         <a:defRPr sz="1200">
                           <a:solidFill>
-                            <a:srgbClr val="34495E"/>
+                            <a:srgbClr val="463C32"/>
                           </a:solidFill>
                         </a:defRPr>
                       </a:pPr>
@@ -9823,7 +9996,7 @@
                   </a:txBody>
                   <a:tcPr>
                     <a:solidFill>
-                      <a:srgbClr val="ECF0F1"/>
+                      <a:srgbClr val="C2A78C"/>
                     </a:solidFill>
                   </a:tcPr>
                 </a:tc>
@@ -9842,7 +10015,7 @@
                       <a:pPr algn="ctr">
                         <a:defRPr sz="1200">
                           <a:solidFill>
-                            <a:srgbClr val="34495E"/>
+                            <a:srgbClr val="463C32"/>
                           </a:solidFill>
                         </a:defRPr>
                       </a:pPr>
@@ -9861,7 +10034,7 @@
                       <a:pPr algn="ctr">
                         <a:defRPr sz="1200">
                           <a:solidFill>
-                            <a:srgbClr val="34495E"/>
+                            <a:srgbClr val="463C32"/>
                           </a:solidFill>
                         </a:defRPr>
                       </a:pPr>
@@ -9880,7 +10053,7 @@
                       <a:pPr algn="ctr">
                         <a:defRPr sz="1200">
                           <a:solidFill>
-                            <a:srgbClr val="34495E"/>
+                            <a:srgbClr val="463C32"/>
                           </a:solidFill>
                         </a:defRPr>
                       </a:pPr>
@@ -9906,7 +10079,7 @@
                       <a:pPr algn="ctr">
                         <a:defRPr sz="1200">
                           <a:solidFill>
-                            <a:srgbClr val="34495E"/>
+                            <a:srgbClr val="463C32"/>
                           </a:solidFill>
                         </a:defRPr>
                       </a:pPr>
@@ -9917,7 +10090,7 @@
                   </a:txBody>
                   <a:tcPr>
                     <a:solidFill>
-                      <a:srgbClr val="ECF0F1"/>
+                      <a:srgbClr val="C2A78C"/>
                     </a:solidFill>
                   </a:tcPr>
                 </a:tc>
@@ -9929,7 +10102,7 @@
                       <a:pPr algn="ctr">
                         <a:defRPr sz="1200">
                           <a:solidFill>
-                            <a:srgbClr val="34495E"/>
+                            <a:srgbClr val="463C32"/>
                           </a:solidFill>
                         </a:defRPr>
                       </a:pPr>
@@ -9940,7 +10113,7 @@
                   </a:txBody>
                   <a:tcPr>
                     <a:solidFill>
-                      <a:srgbClr val="ECF0F1"/>
+                      <a:srgbClr val="C2A78C"/>
                     </a:solidFill>
                   </a:tcPr>
                 </a:tc>
@@ -9952,7 +10125,7 @@
                       <a:pPr algn="ctr">
                         <a:defRPr sz="1200">
                           <a:solidFill>
-                            <a:srgbClr val="34495E"/>
+                            <a:srgbClr val="463C32"/>
                           </a:solidFill>
                         </a:defRPr>
                       </a:pPr>
@@ -9963,7 +10136,7 @@
                   </a:txBody>
                   <a:tcPr>
                     <a:solidFill>
-                      <a:srgbClr val="ECF0F1"/>
+                      <a:srgbClr val="C2A78C"/>
                     </a:solidFill>
                   </a:tcPr>
                 </a:tc>
@@ -9982,7 +10155,7 @@
                       <a:pPr algn="ctr">
                         <a:defRPr sz="1200">
                           <a:solidFill>
-                            <a:srgbClr val="34495E"/>
+                            <a:srgbClr val="463C32"/>
                           </a:solidFill>
                         </a:defRPr>
                       </a:pPr>
@@ -10001,7 +10174,7 @@
                       <a:pPr algn="ctr">
                         <a:defRPr sz="1200">
                           <a:solidFill>
-                            <a:srgbClr val="34495E"/>
+                            <a:srgbClr val="463C32"/>
                           </a:solidFill>
                         </a:defRPr>
                       </a:pPr>
@@ -10020,7 +10193,7 @@
                       <a:pPr algn="ctr">
                         <a:defRPr sz="1200">
                           <a:solidFill>
-                            <a:srgbClr val="34495E"/>
+                            <a:srgbClr val="463C32"/>
                           </a:solidFill>
                         </a:defRPr>
                       </a:pPr>
@@ -10066,7 +10239,7 @@
             <a:pPr>
               <a:defRPr sz="1200" b="1">
                 <a:solidFill>
-                  <a:srgbClr val="003366"/>
+                  <a:srgbClr val="65523F"/>
                 </a:solidFill>
               </a:defRPr>
             </a:pPr>
@@ -10090,7 +10263,7 @@
     <p:bg>
       <p:bgPr>
         <a:solidFill>
-          <a:srgbClr val="FFFFFF"/>
+          <a:srgbClr val="F0EBE1"/>
         </a:solidFill>
         <a:effectLst/>
       </p:bgPr>
@@ -10124,11 +10297,11 @@
             <a:avLst/>
           </a:prstGeom>
           <a:solidFill>
-            <a:srgbClr val="003366"/>
+            <a:srgbClr val="65523F"/>
           </a:solidFill>
           <a:ln>
             <a:solidFill>
-              <a:srgbClr val="003366"/>
+              <a:srgbClr val="65523F"/>
             </a:solidFill>
           </a:ln>
         </p:spPr>
@@ -10184,7 +10357,7 @@
             <a:avLst/>
           </a:prstGeom>
           <a:solidFill>
-            <a:srgbClr val="2980B9"/>
+            <a:srgbClr val="CC5500"/>
           </a:solidFill>
           <a:ln>
             <a:noFill/>
@@ -10228,11 +10401,11 @@
             <a:avLst/>
           </a:prstGeom>
           <a:solidFill>
-            <a:srgbClr val="ECF0F1"/>
+            <a:srgbClr val="C2A78C"/>
           </a:solidFill>
           <a:ln>
             <a:solidFill>
-              <a:srgbClr val="95A5A6"/>
+              <a:srgbClr val="65523F"/>
             </a:solidFill>
           </a:ln>
         </p:spPr>
@@ -10260,7 +10433,7 @@
               </a:spcBef>
               <a:defRPr sz="1000">
                 <a:solidFill>
-                  <a:srgbClr val="34495E"/>
+                  <a:srgbClr val="463C32"/>
                 </a:solidFill>
                 <a:latin typeface="Courier New"/>
               </a:defRPr>
@@ -10353,7 +10526,7 @@
     <p:bg>
       <p:bgPr>
         <a:solidFill>
-          <a:srgbClr val="FFFFFF"/>
+          <a:srgbClr val="F0EBE1"/>
         </a:solidFill>
         <a:effectLst/>
       </p:bgPr>
@@ -10387,11 +10560,11 @@
             <a:avLst/>
           </a:prstGeom>
           <a:solidFill>
-            <a:srgbClr val="003366"/>
+            <a:srgbClr val="65523F"/>
           </a:solidFill>
           <a:ln>
             <a:solidFill>
-              <a:srgbClr val="003366"/>
+              <a:srgbClr val="65523F"/>
             </a:solidFill>
           </a:ln>
         </p:spPr>
@@ -10447,7 +10620,7 @@
             <a:avLst/>
           </a:prstGeom>
           <a:solidFill>
-            <a:srgbClr val="2980B9"/>
+            <a:srgbClr val="CC5500"/>
           </a:solidFill>
           <a:ln>
             <a:noFill/>
@@ -10501,7 +10674,7 @@
             <a:pPr>
               <a:defRPr sz="1200" b="0">
                 <a:solidFill>
-                  <a:srgbClr val="95A5A6"/>
+                  <a:srgbClr val="786E64"/>
                 </a:solidFill>
               </a:defRPr>
             </a:pPr>
@@ -10543,7 +10716,7 @@
         </p:nvSpPr>
         <p:spPr>
           <a:xfrm>
-            <a:off x="731520" y="5029200"/>
+            <a:off x="914400" y="5486400"/>
             <a:ext cx="7680960" cy="1371600"/>
           </a:xfrm>
           <a:prstGeom prst="rect">
@@ -10560,21 +10733,77 @@
             <a:pPr>
               <a:defRPr sz="1200" b="1">
                 <a:solidFill>
-                  <a:srgbClr val="003366"/>
+                  <a:srgbClr val="65523F"/>
                 </a:solidFill>
               </a:defRPr>
             </a:pPr>
             <a:r>
-              <a:t>✓ 0 erros encontrados</a:t>
-            </a:r>
-            <a:br/>
-            <a:r>
-              <a:t>✓ Estrutura conforme especificação XSD</a:t>
-            </a:r>
-            <a:br/>
-            <a:r>
-              <a:t>✓ Conformidade integral comprovada</a:t>
-            </a:r>
+              <a:rPr dirty="0"/>
+              <a:t>✓ 0 </a:t>
+            </a:r>
+            <a:r>
+              <a:rPr dirty="0" err="1"/>
+              <a:t>erros</a:t>
+            </a:r>
+            <a:r>
+              <a:rPr dirty="0"/>
+              <a:t> </a:t>
+            </a:r>
+            <a:r>
+              <a:rPr dirty="0" err="1"/>
+              <a:t>encontrados</a:t>
+            </a:r>
+            <a:br>
+              <a:rPr dirty="0"/>
+            </a:br>
+            <a:r>
+              <a:rPr dirty="0"/>
+              <a:t>✓ </a:t>
+            </a:r>
+            <a:r>
+              <a:rPr dirty="0" err="1"/>
+              <a:t>Estrutura</a:t>
+            </a:r>
+            <a:r>
+              <a:rPr dirty="0"/>
+              <a:t> </a:t>
+            </a:r>
+            <a:r>
+              <a:rPr dirty="0" err="1"/>
+              <a:t>conforme</a:t>
+            </a:r>
+            <a:r>
+              <a:rPr dirty="0"/>
+              <a:t> </a:t>
+            </a:r>
+            <a:r>
+              <a:rPr dirty="0" err="1"/>
+              <a:t>especificação</a:t>
+            </a:r>
+            <a:r>
+              <a:rPr dirty="0"/>
+              <a:t> XSD</a:t>
+            </a:r>
+            <a:br>
+              <a:rPr dirty="0"/>
+            </a:br>
+            <a:r>
+              <a:rPr dirty="0"/>
+              <a:t>✓ </a:t>
+            </a:r>
+            <a:r>
+              <a:rPr dirty="0" err="1"/>
+              <a:t>Conformidade</a:t>
+            </a:r>
+            <a:r>
+              <a:rPr dirty="0"/>
+              <a:t> integral </a:t>
+            </a:r>
+            <a:r>
+              <a:rPr dirty="0" err="1"/>
+              <a:t>comprovada</a:t>
+            </a:r>
+            <a:endParaRPr dirty="0"/>
           </a:p>
         </p:txBody>
       </p:sp>
@@ -10592,7 +10821,7 @@
     <p:bg>
       <p:bgPr>
         <a:solidFill>
-          <a:srgbClr val="FFFFFF"/>
+          <a:srgbClr val="F0EBE1"/>
         </a:solidFill>
         <a:effectLst/>
       </p:bgPr>
@@ -10626,11 +10855,11 @@
             <a:avLst/>
           </a:prstGeom>
           <a:solidFill>
-            <a:srgbClr val="003366"/>
+            <a:srgbClr val="65523F"/>
           </a:solidFill>
           <a:ln>
             <a:solidFill>
-              <a:srgbClr val="003366"/>
+              <a:srgbClr val="65523F"/>
             </a:solidFill>
           </a:ln>
         </p:spPr>
@@ -10686,7 +10915,7 @@
             <a:avLst/>
           </a:prstGeom>
           <a:solidFill>
-            <a:srgbClr val="2980B9"/>
+            <a:srgbClr val="CC5500"/>
           </a:solidFill>
           <a:ln>
             <a:noFill/>
@@ -10740,7 +10969,7 @@
             <a:pPr>
               <a:defRPr sz="1200" b="0">
                 <a:solidFill>
-                  <a:srgbClr val="95A5A6"/>
+                  <a:srgbClr val="786E64"/>
                 </a:solidFill>
               </a:defRPr>
             </a:pPr>
@@ -10760,7 +10989,7 @@
         </p:nvGraphicFramePr>
         <p:xfrm>
           <a:off x="731520" y="1371600"/>
-          <a:ext cx="7498077" cy="2240279"/>
+          <a:ext cx="7498077" cy="2377440"/>
         </p:xfrm>
         <a:graphic>
           <a:graphicData uri="http://schemas.openxmlformats.org/drawingml/2006/table">
@@ -10811,7 +11040,7 @@
                   </a:txBody>
                   <a:tcPr>
                     <a:solidFill>
-                      <a:srgbClr val="003366"/>
+                      <a:srgbClr val="65523F"/>
                     </a:solidFill>
                   </a:tcPr>
                 </a:tc>
@@ -10834,7 +11063,7 @@
                   </a:txBody>
                   <a:tcPr>
                     <a:solidFill>
-                      <a:srgbClr val="003366"/>
+                      <a:srgbClr val="65523F"/>
                     </a:solidFill>
                   </a:tcPr>
                 </a:tc>
@@ -10857,7 +11086,7 @@
                   </a:txBody>
                   <a:tcPr>
                     <a:solidFill>
-                      <a:srgbClr val="003366"/>
+                      <a:srgbClr val="65523F"/>
                     </a:solidFill>
                   </a:tcPr>
                 </a:tc>
@@ -10876,7 +11105,7 @@
                       <a:pPr algn="ctr">
                         <a:defRPr sz="1200">
                           <a:solidFill>
-                            <a:srgbClr val="34495E"/>
+                            <a:srgbClr val="463C32"/>
                           </a:solidFill>
                         </a:defRPr>
                       </a:pPr>
@@ -10895,7 +11124,7 @@
                       <a:pPr algn="ctr">
                         <a:defRPr sz="1200">
                           <a:solidFill>
-                            <a:srgbClr val="34495E"/>
+                            <a:srgbClr val="463C32"/>
                           </a:solidFill>
                         </a:defRPr>
                       </a:pPr>
@@ -10914,7 +11143,7 @@
                       <a:pPr algn="ctr">
                         <a:defRPr sz="1200">
                           <a:solidFill>
-                            <a:srgbClr val="34495E"/>
+                            <a:srgbClr val="463C32"/>
                           </a:solidFill>
                         </a:defRPr>
                       </a:pPr>
@@ -10940,7 +11169,7 @@
                       <a:pPr algn="ctr">
                         <a:defRPr sz="1200">
                           <a:solidFill>
-                            <a:srgbClr val="34495E"/>
+                            <a:srgbClr val="463C32"/>
                           </a:solidFill>
                         </a:defRPr>
                       </a:pPr>
@@ -10951,7 +11180,7 @@
                   </a:txBody>
                   <a:tcPr>
                     <a:solidFill>
-                      <a:srgbClr val="ECF0F1"/>
+                      <a:srgbClr val="C2A78C"/>
                     </a:solidFill>
                   </a:tcPr>
                 </a:tc>
@@ -10963,7 +11192,7 @@
                       <a:pPr algn="ctr">
                         <a:defRPr sz="1200">
                           <a:solidFill>
-                            <a:srgbClr val="34495E"/>
+                            <a:srgbClr val="463C32"/>
                           </a:solidFill>
                         </a:defRPr>
                       </a:pPr>
@@ -10974,7 +11203,7 @@
                   </a:txBody>
                   <a:tcPr>
                     <a:solidFill>
-                      <a:srgbClr val="ECF0F1"/>
+                      <a:srgbClr val="C2A78C"/>
                     </a:solidFill>
                   </a:tcPr>
                 </a:tc>
@@ -10986,7 +11215,7 @@
                       <a:pPr algn="ctr">
                         <a:defRPr sz="1200">
                           <a:solidFill>
-                            <a:srgbClr val="34495E"/>
+                            <a:srgbClr val="463C32"/>
                           </a:solidFill>
                         </a:defRPr>
                       </a:pPr>
@@ -10997,7 +11226,7 @@
                   </a:txBody>
                   <a:tcPr>
                     <a:solidFill>
-                      <a:srgbClr val="ECF0F1"/>
+                      <a:srgbClr val="C2A78C"/>
                     </a:solidFill>
                   </a:tcPr>
                 </a:tc>
@@ -11016,7 +11245,7 @@
                       <a:pPr algn="ctr">
                         <a:defRPr sz="1200">
                           <a:solidFill>
-                            <a:srgbClr val="34495E"/>
+                            <a:srgbClr val="463C32"/>
                           </a:solidFill>
                         </a:defRPr>
                       </a:pPr>
@@ -11035,7 +11264,7 @@
                       <a:pPr algn="ctr">
                         <a:defRPr sz="1200">
                           <a:solidFill>
-                            <a:srgbClr val="34495E"/>
+                            <a:srgbClr val="463C32"/>
                           </a:solidFill>
                         </a:defRPr>
                       </a:pPr>
@@ -11054,7 +11283,7 @@
                       <a:pPr algn="ctr">
                         <a:defRPr sz="1200">
                           <a:solidFill>
-                            <a:srgbClr val="34495E"/>
+                            <a:srgbClr val="463C32"/>
                           </a:solidFill>
                         </a:defRPr>
                       </a:pPr>
@@ -11080,7 +11309,7 @@
                       <a:pPr algn="ctr">
                         <a:defRPr sz="1200">
                           <a:solidFill>
-                            <a:srgbClr val="34495E"/>
+                            <a:srgbClr val="463C32"/>
                           </a:solidFill>
                         </a:defRPr>
                       </a:pPr>
@@ -11091,7 +11320,7 @@
                   </a:txBody>
                   <a:tcPr>
                     <a:solidFill>
-                      <a:srgbClr val="ECF0F1"/>
+                      <a:srgbClr val="C2A78C"/>
                     </a:solidFill>
                   </a:tcPr>
                 </a:tc>
@@ -11103,7 +11332,7 @@
                       <a:pPr algn="ctr">
                         <a:defRPr sz="1200">
                           <a:solidFill>
-                            <a:srgbClr val="34495E"/>
+                            <a:srgbClr val="463C32"/>
                           </a:solidFill>
                         </a:defRPr>
                       </a:pPr>
@@ -11114,7 +11343,7 @@
                   </a:txBody>
                   <a:tcPr>
                     <a:solidFill>
-                      <a:srgbClr val="ECF0F1"/>
+                      <a:srgbClr val="C2A78C"/>
                     </a:solidFill>
                   </a:tcPr>
                 </a:tc>
@@ -11126,7 +11355,7 @@
                       <a:pPr algn="ctr">
                         <a:defRPr sz="1200">
                           <a:solidFill>
-                            <a:srgbClr val="34495E"/>
+                            <a:srgbClr val="463C32"/>
                           </a:solidFill>
                         </a:defRPr>
                       </a:pPr>
@@ -11137,7 +11366,7 @@
                   </a:txBody>
                   <a:tcPr>
                     <a:solidFill>
-                      <a:srgbClr val="ECF0F1"/>
+                      <a:srgbClr val="C2A78C"/>
                     </a:solidFill>
                   </a:tcPr>
                 </a:tc>
@@ -11156,7 +11385,7 @@
                       <a:pPr algn="ctr">
                         <a:defRPr sz="1200">
                           <a:solidFill>
-                            <a:srgbClr val="34495E"/>
+                            <a:srgbClr val="463C32"/>
                           </a:solidFill>
                         </a:defRPr>
                       </a:pPr>
@@ -11175,7 +11404,7 @@
                       <a:pPr algn="ctr">
                         <a:defRPr sz="1200">
                           <a:solidFill>
-                            <a:srgbClr val="34495E"/>
+                            <a:srgbClr val="463C32"/>
                           </a:solidFill>
                         </a:defRPr>
                       </a:pPr>
@@ -11194,7 +11423,7 @@
                       <a:pPr algn="ctr">
                         <a:defRPr sz="1200">
                           <a:solidFill>
-                            <a:srgbClr val="34495E"/>
+                            <a:srgbClr val="463C32"/>
                           </a:solidFill>
                         </a:defRPr>
                       </a:pPr>
@@ -11220,7 +11449,7 @@
                       <a:pPr algn="ctr">
                         <a:defRPr sz="1200">
                           <a:solidFill>
-                            <a:srgbClr val="34495E"/>
+                            <a:srgbClr val="463C32"/>
                           </a:solidFill>
                         </a:defRPr>
                       </a:pPr>
@@ -11231,7 +11460,7 @@
                   </a:txBody>
                   <a:tcPr>
                     <a:solidFill>
-                      <a:srgbClr val="ECF0F1"/>
+                      <a:srgbClr val="C2A78C"/>
                     </a:solidFill>
                   </a:tcPr>
                 </a:tc>
@@ -11243,7 +11472,7 @@
                       <a:pPr algn="ctr">
                         <a:defRPr sz="1200">
                           <a:solidFill>
-                            <a:srgbClr val="34495E"/>
+                            <a:srgbClr val="463C32"/>
                           </a:solidFill>
                         </a:defRPr>
                       </a:pPr>
@@ -11254,7 +11483,7 @@
                   </a:txBody>
                   <a:tcPr>
                     <a:solidFill>
-                      <a:srgbClr val="ECF0F1"/>
+                      <a:srgbClr val="C2A78C"/>
                     </a:solidFill>
                   </a:tcPr>
                 </a:tc>
@@ -11266,7 +11495,7 @@
                       <a:pPr algn="ctr">
                         <a:defRPr sz="1200">
                           <a:solidFill>
-                            <a:srgbClr val="34495E"/>
+                            <a:srgbClr val="463C32"/>
                           </a:solidFill>
                         </a:defRPr>
                       </a:pPr>
@@ -11277,7 +11506,7 @@
                   </a:txBody>
                   <a:tcPr>
                     <a:solidFill>
-                      <a:srgbClr val="ECF0F1"/>
+                      <a:srgbClr val="C2A78C"/>
                     </a:solidFill>
                   </a:tcPr>
                 </a:tc>
@@ -11305,7 +11534,7 @@
     <p:bg>
       <p:bgPr>
         <a:solidFill>
-          <a:srgbClr val="FFFFFF"/>
+          <a:srgbClr val="F0EBE1"/>
         </a:solidFill>
         <a:effectLst/>
       </p:bgPr>
@@ -11339,11 +11568,11 @@
             <a:avLst/>
           </a:prstGeom>
           <a:solidFill>
-            <a:srgbClr val="003366"/>
+            <a:srgbClr val="65523F"/>
           </a:solidFill>
           <a:ln>
             <a:solidFill>
-              <a:srgbClr val="003366"/>
+              <a:srgbClr val="65523F"/>
             </a:solidFill>
           </a:ln>
         </p:spPr>
@@ -11399,7 +11628,7 @@
             <a:avLst/>
           </a:prstGeom>
           <a:solidFill>
-            <a:srgbClr val="2980B9"/>
+            <a:srgbClr val="CC5500"/>
           </a:solidFill>
           <a:ln>
             <a:noFill/>
@@ -11453,7 +11682,7 @@
             <a:pPr>
               <a:defRPr sz="1100" b="0">
                 <a:solidFill>
-                  <a:srgbClr val="95A5A6"/>
+                  <a:srgbClr val="786E64"/>
                 </a:solidFill>
               </a:defRPr>
             </a:pPr>
@@ -11531,7 +11760,7 @@
                   </a:txBody>
                   <a:tcPr>
                     <a:solidFill>
-                      <a:srgbClr val="003366"/>
+                      <a:srgbClr val="65523F"/>
                     </a:solidFill>
                   </a:tcPr>
                 </a:tc>
@@ -11554,7 +11783,7 @@
                   </a:txBody>
                   <a:tcPr>
                     <a:solidFill>
-                      <a:srgbClr val="003366"/>
+                      <a:srgbClr val="65523F"/>
                     </a:solidFill>
                   </a:tcPr>
                 </a:tc>
@@ -11577,7 +11806,7 @@
                   </a:txBody>
                   <a:tcPr>
                     <a:solidFill>
-                      <a:srgbClr val="003366"/>
+                      <a:srgbClr val="65523F"/>
                     </a:solidFill>
                   </a:tcPr>
                 </a:tc>
@@ -11600,7 +11829,7 @@
                   </a:txBody>
                   <a:tcPr>
                     <a:solidFill>
-                      <a:srgbClr val="003366"/>
+                      <a:srgbClr val="65523F"/>
                     </a:solidFill>
                   </a:tcPr>
                 </a:tc>
@@ -11619,7 +11848,7 @@
                       <a:pPr algn="ctr">
                         <a:defRPr sz="1200">
                           <a:solidFill>
-                            <a:srgbClr val="34495E"/>
+                            <a:srgbClr val="463C32"/>
                           </a:solidFill>
                         </a:defRPr>
                       </a:pPr>
@@ -11638,7 +11867,7 @@
                       <a:pPr algn="ctr">
                         <a:defRPr sz="1200">
                           <a:solidFill>
-                            <a:srgbClr val="34495E"/>
+                            <a:srgbClr val="463C32"/>
                           </a:solidFill>
                         </a:defRPr>
                       </a:pPr>
@@ -11657,7 +11886,7 @@
                       <a:pPr algn="ctr">
                         <a:defRPr sz="1200">
                           <a:solidFill>
-                            <a:srgbClr val="34495E"/>
+                            <a:srgbClr val="463C32"/>
                           </a:solidFill>
                         </a:defRPr>
                       </a:pPr>
@@ -11676,7 +11905,7 @@
                       <a:pPr algn="ctr">
                         <a:defRPr sz="1200">
                           <a:solidFill>
-                            <a:srgbClr val="34495E"/>
+                            <a:srgbClr val="463C32"/>
                           </a:solidFill>
                         </a:defRPr>
                       </a:pPr>
@@ -11702,7 +11931,7 @@
                       <a:pPr algn="ctr">
                         <a:defRPr sz="1200">
                           <a:solidFill>
-                            <a:srgbClr val="34495E"/>
+                            <a:srgbClr val="463C32"/>
                           </a:solidFill>
                         </a:defRPr>
                       </a:pPr>
@@ -11713,7 +11942,7 @@
                   </a:txBody>
                   <a:tcPr>
                     <a:solidFill>
-                      <a:srgbClr val="ECF0F1"/>
+                      <a:srgbClr val="C2A78C"/>
                     </a:solidFill>
                   </a:tcPr>
                 </a:tc>
@@ -11725,7 +11954,7 @@
                       <a:pPr algn="ctr">
                         <a:defRPr sz="1200">
                           <a:solidFill>
-                            <a:srgbClr val="34495E"/>
+                            <a:srgbClr val="463C32"/>
                           </a:solidFill>
                         </a:defRPr>
                       </a:pPr>
@@ -11736,7 +11965,7 @@
                   </a:txBody>
                   <a:tcPr>
                     <a:solidFill>
-                      <a:srgbClr val="ECF0F1"/>
+                      <a:srgbClr val="C2A78C"/>
                     </a:solidFill>
                   </a:tcPr>
                 </a:tc>
@@ -11748,7 +11977,7 @@
                       <a:pPr algn="ctr">
                         <a:defRPr sz="1200">
                           <a:solidFill>
-                            <a:srgbClr val="34495E"/>
+                            <a:srgbClr val="463C32"/>
                           </a:solidFill>
                         </a:defRPr>
                       </a:pPr>
@@ -11759,7 +11988,7 @@
                   </a:txBody>
                   <a:tcPr>
                     <a:solidFill>
-                      <a:srgbClr val="ECF0F1"/>
+                      <a:srgbClr val="C2A78C"/>
                     </a:solidFill>
                   </a:tcPr>
                 </a:tc>
@@ -11771,7 +12000,7 @@
                       <a:pPr algn="ctr">
                         <a:defRPr sz="1200">
                           <a:solidFill>
-                            <a:srgbClr val="34495E"/>
+                            <a:srgbClr val="463C32"/>
                           </a:solidFill>
                         </a:defRPr>
                       </a:pPr>
@@ -11782,7 +12011,7 @@
                   </a:txBody>
                   <a:tcPr>
                     <a:solidFill>
-                      <a:srgbClr val="ECF0F1"/>
+                      <a:srgbClr val="C2A78C"/>
                     </a:solidFill>
                   </a:tcPr>
                 </a:tc>
@@ -11801,7 +12030,7 @@
                       <a:pPr algn="ctr">
                         <a:defRPr sz="1200">
                           <a:solidFill>
-                            <a:srgbClr val="34495E"/>
+                            <a:srgbClr val="463C32"/>
                           </a:solidFill>
                         </a:defRPr>
                       </a:pPr>
@@ -11820,7 +12049,7 @@
                       <a:pPr algn="ctr">
                         <a:defRPr sz="1200">
                           <a:solidFill>
-                            <a:srgbClr val="34495E"/>
+                            <a:srgbClr val="463C32"/>
                           </a:solidFill>
                         </a:defRPr>
                       </a:pPr>
@@ -11839,7 +12068,7 @@
                       <a:pPr algn="ctr">
                         <a:defRPr sz="1200">
                           <a:solidFill>
-                            <a:srgbClr val="34495E"/>
+                            <a:srgbClr val="463C32"/>
                           </a:solidFill>
                         </a:defRPr>
                       </a:pPr>
@@ -11858,7 +12087,7 @@
                       <a:pPr algn="ctr">
                         <a:defRPr sz="1200">
                           <a:solidFill>
-                            <a:srgbClr val="34495E"/>
+                            <a:srgbClr val="463C32"/>
                           </a:solidFill>
                         </a:defRPr>
                       </a:pPr>
@@ -11904,7 +12133,7 @@
             <a:pPr>
               <a:defRPr sz="1100" b="1">
                 <a:solidFill>
-                  <a:srgbClr val="003366"/>
+                  <a:srgbClr val="65523F"/>
                 </a:solidFill>
               </a:defRPr>
             </a:pPr>
